--- a/docs/pitch.pptx
+++ b/docs/pitch.pptx
@@ -4,6 +4,9 @@
   <p:sldMasterIdLst>
     <p:sldMasterId id="2147483648" r:id="rId1"/>
   </p:sldMasterIdLst>
+  <p:notesMasterIdLst>
+    <p:notesMasterId r:id="rId14"/>
+  </p:notesMasterIdLst>
   <p:sldIdLst>
     <p:sldId id="256" r:id="rId2"/>
     <p:sldId id="257" r:id="rId3"/>
@@ -18,9 +21,6 @@
     <p:sldId id="266" r:id="rId12"/>
     <p:sldId id="267" r:id="rId13"/>
   </p:sldIdLst>
-  <p:notesMasterIdLst>
-    <p:notesMasterId r:id="rId14"/>
-  </p:notesMasterIdLst>
   <p:sldSz cx="12192000" cy="6858000"/>
   <p:notesSz cx="6858000" cy="12192000"/>
   <p:defaultTextStyle>
@@ -115,13 +115,20 @@
       </a:defRPr>
     </a:lvl9pPr>
   </p:defaultTextStyle>
+  <p:extLst>
+    <p:ext uri="{EFAFB233-063F-42B5-8137-9DF3F51BA10A}">
+      <p15:sldGuideLst xmlns:p15="http://schemas.microsoft.com/office/powerpoint/2012/main"/>
+    </p:ext>
+  </p:extLst>
 </p:presentation>
 </file>
 
 <file path=ppt/charts/chart1.xml><?xml version="1.0" encoding="utf-8"?>
-<c:chartSpace xmlns:c="http://schemas.openxmlformats.org/drawingml/2006/chart" xmlns:a="http://schemas.openxmlformats.org/drawingml/2006/main" xmlns:r="http://schemas.openxmlformats.org/officeDocument/2006/relationships">
+<c:chartSpace xmlns:c="http://schemas.openxmlformats.org/drawingml/2006/chart" xmlns:a="http://schemas.openxmlformats.org/drawingml/2006/main" xmlns:r="http://schemas.openxmlformats.org/officeDocument/2006/relationships" xmlns:c16r2="http://schemas.microsoft.com/office/drawing/2015/06/chart">
   <c:date1904 val="0"/>
+  <c:lang val="en-US"/>
   <c:roundedCorners val="1"/>
+  <c:style val="2"/>
   <c:chart>
     <c:autoTitleDeleted val="1"/>
     <c:plotArea>
@@ -151,30 +158,6 @@
             <a:effectLst/>
           </c:spPr>
           <c:invertIfNegative val="0"/>
-          <c:dLbls>
-            <c:numFmt formatCode="0.0&quot;%&quot;" sourceLinked="0"/>
-            <c:txPr>
-              <a:bodyPr/>
-              <a:lstStyle/>
-              <a:p>
-                <a:pPr>
-                  <a:defRPr b="1" i="0" strike="noStrike" sz="1300" u="none">
-                    <a:solidFill>
-                      <a:srgbClr val="16203A"/>
-                    </a:solidFill>
-                    <a:latin typeface="Calibri"/>
-                  </a:defRPr>
-                </a:pPr>
-              </a:p>
-            </c:txPr>
-            <c:showLegendKey val="0"/>
-            <c:showVal val="1"/>
-            <c:showCatName val="0"/>
-            <c:showSerName val="0"/>
-            <c:showPercent val="0"/>
-            <c:showBubbleSize val="0"/>
-            <c:showLeaderLines val="0"/>
-          </c:dLbls>
           <c:dPt>
             <c:idx val="0"/>
             <c:invertIfNegative val="0"/>
@@ -185,6 +168,11 @@
               </a:solidFill>
               <a:effectLst/>
             </c:spPr>
+            <c:extLst>
+              <c:ext xmlns:c16="http://schemas.microsoft.com/office/drawing/2014/chart" uri="{C3380CC4-5D6E-409C-BE32-E72D297353CC}">
+                <c16:uniqueId val="{00000001-5D87-442C-AD10-7489D2FC6F4A}"/>
+              </c:ext>
+            </c:extLst>
           </c:dPt>
           <c:dPt>
             <c:idx val="1"/>
@@ -196,6 +184,11 @@
               </a:solidFill>
               <a:effectLst/>
             </c:spPr>
+            <c:extLst>
+              <c:ext xmlns:c16="http://schemas.microsoft.com/office/drawing/2014/chart" uri="{C3380CC4-5D6E-409C-BE32-E72D297353CC}">
+                <c16:uniqueId val="{00000003-5D87-442C-AD10-7489D2FC6F4A}"/>
+              </c:ext>
+            </c:extLst>
           </c:dPt>
           <c:dPt>
             <c:idx val="2"/>
@@ -207,28 +200,68 @@
               </a:solidFill>
               <a:effectLst/>
             </c:spPr>
+            <c:extLst>
+              <c:ext xmlns:c16="http://schemas.microsoft.com/office/drawing/2014/chart" uri="{C3380CC4-5D6E-409C-BE32-E72D297353CC}">
+                <c16:uniqueId val="{00000005-5D87-442C-AD10-7489D2FC6F4A}"/>
+              </c:ext>
+            </c:extLst>
           </c:dPt>
+          <c:dLbls>
+            <c:numFmt formatCode="0.0&quot;%&quot;" sourceLinked="0"/>
+            <c:spPr>
+              <a:noFill/>
+              <a:ln>
+                <a:noFill/>
+              </a:ln>
+              <a:effectLst/>
+            </c:spPr>
+            <c:txPr>
+              <a:bodyPr/>
+              <a:lstStyle/>
+              <a:p>
+                <a:pPr>
+                  <a:defRPr sz="1300" b="1" i="0" u="none" strike="noStrike">
+                    <a:solidFill>
+                      <a:srgbClr val="16203A"/>
+                    </a:solidFill>
+                    <a:latin typeface="Calibri"/>
+                  </a:defRPr>
+                </a:pPr>
+                <a:endParaRPr lang="en-US"/>
+              </a:p>
+            </c:txPr>
+            <c:showLegendKey val="0"/>
+            <c:showVal val="1"/>
+            <c:showCatName val="0"/>
+            <c:showSerName val="0"/>
+            <c:showPercent val="0"/>
+            <c:showBubbleSize val="0"/>
+            <c:showLeaderLines val="0"/>
+            <c:extLst>
+              <c:ext xmlns:c15="http://schemas.microsoft.com/office/drawing/2012/chart" uri="{CE6537A1-D6FC-4f65-9D91-7224C49458BB}">
+                <c15:showLeaderLines val="0"/>
+              </c:ext>
+            </c:extLst>
+          </c:dLbls>
           <c:cat>
-            <c:multiLvlStrRef>
+            <c:strRef>
               <c:f>Sheet1!$A$2:$A$4</c:f>
-              <c:multiLvlStrCache>
+              <c:strCache>
                 <c:ptCount val="3"/>
-                <c:lvl>
-                  <c:pt idx="0">
-                    <c:v>Naive RAG
+                <c:pt idx="0">
+                  <c:v>Naive RAG
 top-3, no routing</c:v>
-                  </c:pt>
-                  <c:pt idx="1">
-                    <c:v>GraphRAG-style
+                </c:pt>
+                <c:pt idx="1">
+                  <c:v>GraphRAG-style
 summaries + edges</c:v>
-                  </c:pt>
-                  <c:pt idx="2">
-                    <c:v>Company Brain
+                </c:pt>
+                <c:pt idx="2">
+                  <c:v>Company Brain
 routed + hybrid</c:v>
-                  </c:pt>
-                </c:lvl>
-              </c:multiLvlStrCache>
-            </c:multiLvlStrRef>
+                </c:pt>
+              </c:strCache>
+            </c:strRef>
           </c:cat>
           <c:val>
             <c:numRef>
@@ -248,36 +281,23 @@
               </c:numCache>
             </c:numRef>
           </c:val>
+          <c:extLst>
+            <c:ext xmlns:c16="http://schemas.microsoft.com/office/drawing/2014/chart" uri="{C3380CC4-5D6E-409C-BE32-E72D297353CC}">
+              <c16:uniqueId val="{00000006-5D87-442C-AD10-7489D2FC6F4A}"/>
+            </c:ext>
+          </c:extLst>
         </c:ser>
         <c:dLbls>
-          <c:numFmt formatCode="0.0&quot;%&quot;" sourceLinked="0"/>
-          <c:txPr>
-            <a:bodyPr/>
-            <a:lstStyle/>
-            <a:p>
-              <a:pPr>
-                <a:defRPr b="1" i="0" strike="noStrike" sz="1300" u="none">
-                  <a:solidFill>
-                    <a:srgbClr val="16203A"/>
-                  </a:solidFill>
-                  <a:latin typeface="Calibri"/>
-                </a:defRPr>
-              </a:pPr>
-            </a:p>
-          </c:txPr>
           <c:showLegendKey val="0"/>
           <c:showVal val="1"/>
           <c:showCatName val="0"/>
           <c:showSerName val="0"/>
           <c:showPercent val="0"/>
           <c:showBubbleSize val="0"/>
-          <c:showLeaderLines val="0"/>
         </c:dLbls>
         <c:gapWidth val="55"/>
-        <c:overlap val="0"/>
         <c:axId val="2094734554"/>
         <c:axId val="2094734552"/>
-        <c:axId val="2094734556"/>
       </c:barChart>
       <c:catAx>
         <c:axId val="2094734554"/>
@@ -318,6 +338,7 @@
         <c:crosses val="autoZero"/>
         <c:auto val="1"/>
         <c:lblAlgn val="ctr"/>
+        <c:lblOffset val="100"/>
         <c:noMultiLvlLbl val="1"/>
       </c:catAx>
       <c:valAx>
@@ -382,6 +403,7 @@
     </c:plotArea>
     <c:plotVisOnly val="1"/>
     <c:dispBlanksAs val="span"/>
+    <c:showDLblsOverMax val="1"/>
   </c:chart>
   <c:spPr>
     <a:noFill/>
@@ -397,9 +419,11 @@
 </file>
 
 <file path=ppt/charts/chart2.xml><?xml version="1.0" encoding="utf-8"?>
-<c:chartSpace xmlns:c="http://schemas.openxmlformats.org/drawingml/2006/chart" xmlns:a="http://schemas.openxmlformats.org/drawingml/2006/main" xmlns:r="http://schemas.openxmlformats.org/officeDocument/2006/relationships">
+<c:chartSpace xmlns:c="http://schemas.openxmlformats.org/drawingml/2006/chart" xmlns:a="http://schemas.openxmlformats.org/drawingml/2006/main" xmlns:r="http://schemas.openxmlformats.org/officeDocument/2006/relationships" xmlns:c16r2="http://schemas.microsoft.com/office/drawing/2015/06/chart">
   <c:date1904 val="0"/>
+  <c:lang val="en-US"/>
   <c:roundedCorners val="1"/>
+  <c:style val="2"/>
   <c:chart>
     <c:autoTitleDeleted val="1"/>
     <c:plotArea>
@@ -429,40 +453,15 @@
             <a:effectLst/>
           </c:spPr>
           <c:invertIfNegative val="0"/>
-          <c:dLbls>
-            <c:numFmt formatCode="#,##0" sourceLinked="0"/>
-            <c:txPr>
-              <a:bodyPr/>
-              <a:lstStyle/>
-              <a:p>
-                <a:pPr>
-                  <a:defRPr b="1" i="0" strike="noStrike" sz="1300" u="none">
-                    <a:solidFill>
-                      <a:srgbClr val="16203A"/>
-                    </a:solidFill>
-                    <a:latin typeface="Calibri"/>
-                  </a:defRPr>
-                </a:pPr>
-              </a:p>
-            </c:txPr>
-            <c:showLegendKey val="0"/>
-            <c:showVal val="1"/>
-            <c:showCatName val="0"/>
-            <c:showSerName val="0"/>
-            <c:showPercent val="0"/>
-            <c:showBubbleSize val="0"/>
-            <c:showLeaderLines val="0"/>
-          </c:dLbls>
           <c:dPt>
             <c:idx val="0"/>
             <c:invertIfNegative val="0"/>
             <c:bubble3D val="0"/>
-            <c:spPr>
-              <a:solidFill>
-                <a:srgbClr val="F2A93B"/>
-              </a:solidFill>
-              <a:effectLst/>
-            </c:spPr>
+            <c:extLst>
+              <c:ext xmlns:c16="http://schemas.microsoft.com/office/drawing/2014/chart" uri="{C3380CC4-5D6E-409C-BE32-E72D297353CC}">
+                <c16:uniqueId val="{00000001-C0BE-4A90-81A8-258D0B7F1467}"/>
+              </c:ext>
+            </c:extLst>
           </c:dPt>
           <c:dPt>
             <c:idx val="1"/>
@@ -474,6 +473,11 @@
               </a:solidFill>
               <a:effectLst/>
             </c:spPr>
+            <c:extLst>
+              <c:ext xmlns:c16="http://schemas.microsoft.com/office/drawing/2014/chart" uri="{C3380CC4-5D6E-409C-BE32-E72D297353CC}">
+                <c16:uniqueId val="{00000003-C0BE-4A90-81A8-258D0B7F1467}"/>
+              </c:ext>
+            </c:extLst>
           </c:dPt>
           <c:dPt>
             <c:idx val="2"/>
@@ -485,6 +489,11 @@
               </a:solidFill>
               <a:effectLst/>
             </c:spPr>
+            <c:extLst>
+              <c:ext xmlns:c16="http://schemas.microsoft.com/office/drawing/2014/chart" uri="{C3380CC4-5D6E-409C-BE32-E72D297353CC}">
+                <c16:uniqueId val="{00000005-C0BE-4A90-81A8-258D0B7F1467}"/>
+              </c:ext>
+            </c:extLst>
           </c:dPt>
           <c:dPt>
             <c:idx val="3"/>
@@ -496,28 +505,68 @@
               </a:solidFill>
               <a:effectLst/>
             </c:spPr>
+            <c:extLst>
+              <c:ext xmlns:c16="http://schemas.microsoft.com/office/drawing/2014/chart" uri="{C3380CC4-5D6E-409C-BE32-E72D297353CC}">
+                <c16:uniqueId val="{00000007-C0BE-4A90-81A8-258D0B7F1467}"/>
+              </c:ext>
+            </c:extLst>
           </c:dPt>
+          <c:dLbls>
+            <c:numFmt formatCode="#,##0" sourceLinked="0"/>
+            <c:spPr>
+              <a:noFill/>
+              <a:ln>
+                <a:noFill/>
+              </a:ln>
+              <a:effectLst/>
+            </c:spPr>
+            <c:txPr>
+              <a:bodyPr/>
+              <a:lstStyle/>
+              <a:p>
+                <a:pPr>
+                  <a:defRPr sz="1300" b="1" i="0" u="none" strike="noStrike">
+                    <a:solidFill>
+                      <a:srgbClr val="16203A"/>
+                    </a:solidFill>
+                    <a:latin typeface="Calibri"/>
+                  </a:defRPr>
+                </a:pPr>
+                <a:endParaRPr lang="en-US"/>
+              </a:p>
+            </c:txPr>
+            <c:showLegendKey val="0"/>
+            <c:showVal val="1"/>
+            <c:showCatName val="0"/>
+            <c:showSerName val="0"/>
+            <c:showPercent val="0"/>
+            <c:showBubbleSize val="0"/>
+            <c:showLeaderLines val="0"/>
+            <c:extLst>
+              <c:ext xmlns:c15="http://schemas.microsoft.com/office/drawing/2012/chart" uri="{CE6537A1-D6FC-4f65-9D91-7224C49458BB}">
+                <c15:showLeaderLines val="0"/>
+              </c:ext>
+            </c:extLst>
+          </c:dLbls>
           <c:cat>
-            <c:multiLvlStrRef>
+            <c:strRef>
               <c:f>Sheet1!$A$2:$A$5</c:f>
-              <c:multiLvlStrCache>
+              <c:strCache>
                 <c:ptCount val="4"/>
-                <c:lvl>
-                  <c:pt idx="0">
-                    <c:v>Naive RAG</c:v>
-                  </c:pt>
-                  <c:pt idx="1">
-                    <c:v>Graph edges only</c:v>
-                  </c:pt>
-                  <c:pt idx="2">
-                    <c:v>Chunks only</c:v>
-                  </c:pt>
-                  <c:pt idx="3">
-                    <c:v>Hybrid (ours)</c:v>
-                  </c:pt>
-                </c:lvl>
-              </c:multiLvlStrCache>
-            </c:multiLvlStrRef>
+                <c:pt idx="0">
+                  <c:v>Naive RAG</c:v>
+                </c:pt>
+                <c:pt idx="1">
+                  <c:v>Graph edges only</c:v>
+                </c:pt>
+                <c:pt idx="2">
+                  <c:v>Chunks only</c:v>
+                </c:pt>
+                <c:pt idx="3">
+                  <c:v>Hybrid (ours)</c:v>
+                </c:pt>
+              </c:strCache>
+            </c:strRef>
           </c:cat>
           <c:val>
             <c:numRef>
@@ -540,36 +589,23 @@
               </c:numCache>
             </c:numRef>
           </c:val>
+          <c:extLst>
+            <c:ext xmlns:c16="http://schemas.microsoft.com/office/drawing/2014/chart" uri="{C3380CC4-5D6E-409C-BE32-E72D297353CC}">
+              <c16:uniqueId val="{00000008-C0BE-4A90-81A8-258D0B7F1467}"/>
+            </c:ext>
+          </c:extLst>
         </c:ser>
         <c:dLbls>
-          <c:numFmt formatCode="#,##0" sourceLinked="0"/>
-          <c:txPr>
-            <a:bodyPr/>
-            <a:lstStyle/>
-            <a:p>
-              <a:pPr>
-                <a:defRPr b="1" i="0" strike="noStrike" sz="1300" u="none">
-                  <a:solidFill>
-                    <a:srgbClr val="16203A"/>
-                  </a:solidFill>
-                  <a:latin typeface="Calibri"/>
-                </a:defRPr>
-              </a:pPr>
-            </a:p>
-          </c:txPr>
           <c:showLegendKey val="0"/>
           <c:showVal val="1"/>
           <c:showCatName val="0"/>
           <c:showSerName val="0"/>
           <c:showPercent val="0"/>
           <c:showBubbleSize val="0"/>
-          <c:showLeaderLines val="0"/>
         </c:dLbls>
         <c:gapWidth val="55"/>
-        <c:overlap val="0"/>
         <c:axId val="2094734554"/>
         <c:axId val="2094734552"/>
-        <c:axId val="2094734556"/>
       </c:barChart>
       <c:catAx>
         <c:axId val="2094734554"/>
@@ -610,6 +646,7 @@
         <c:crosses val="autoZero"/>
         <c:auto val="1"/>
         <c:lblAlgn val="ctr"/>
+        <c:lblOffset val="100"/>
         <c:noMultiLvlLbl val="1"/>
       </c:catAx>
       <c:valAx>
@@ -647,7 +684,7 @@
                   </a:defRPr>
                 </a:pPr>
                 <a:r>
-                  <a:rPr sz="1000" b="0" i="0" u="none" strike="noStrike">
+                  <a:rPr lang="en-IN" sz="1000" b="0" i="0" u="none" strike="noStrike">
                     <a:solidFill>
                       <a:srgbClr val="8A97B8"/>
                     </a:solidFill>
@@ -658,7 +695,6 @@
               </a:p>
             </c:rich>
           </c:tx>
-          <c:layout/>
           <c:overlay val="0"/>
         </c:title>
         <c:numFmt formatCode="General" sourceLinked="0"/>
@@ -703,6 +739,7 @@
     </c:plotArea>
     <c:plotVisOnly val="1"/>
     <c:dispBlanksAs val="span"/>
+    <c:showDLblsOverMax val="1"/>
   </c:chart>
   <c:spPr>
     <a:noFill/>
@@ -739,234 +776,10 @@
           <a:chExt cx="0" cy="0"/>
         </a:xfrm>
       </p:grpSpPr>
-      <p:sp>
-        <p:nvSpPr>
-          <p:cNvPr id="2" name="Header Placeholder 1"/>
-          <p:cNvSpPr>
-            <a:spLocks noGrp="1"/>
-          </p:cNvSpPr>
-          <p:nvPr>
-            <p:ph type="hdr" sz="quarter"/>
-          </p:nvPr>
-        </p:nvSpPr>
-        <p:spPr>
-          <a:xfrm>
-            <a:off x="0" y="0"/>
-            <a:ext cx="2971800" cy="458788"/>
-          </a:xfrm>
-          <a:prstGeom prst="rect">
-            <a:avLst/>
-          </a:prstGeom>
-        </p:spPr>
-        <p:txBody>
-          <a:bodyPr vert="horz" lIns="91440" tIns="45720" rIns="91440" bIns="45720" rtlCol="0"/>
-          <a:lstStyle>
-            <a:lvl1pPr algn="l">
-              <a:defRPr sz="1200"/>
-            </a:lvl1pPr>
-          </a:lstStyle>
-          <a:p>
-            <a:endParaRPr lang="en-US"/>
-          </a:p>
-        </p:txBody>
-      </p:sp>
-      <p:sp>
-        <p:nvSpPr>
-          <p:cNvPr id="3" name="Date Placeholder 2"/>
-          <p:cNvSpPr>
-            <a:spLocks noGrp="1"/>
-          </p:cNvSpPr>
-          <p:nvPr>
-            <p:ph type="dt" idx="1"/>
-          </p:nvPr>
-        </p:nvSpPr>
-        <p:spPr>
-          <a:xfrm>
-            <a:off x="3884613" y="0"/>
-            <a:ext cx="2971800" cy="458788"/>
-          </a:xfrm>
-          <a:prstGeom prst="rect">
-            <a:avLst/>
-          </a:prstGeom>
-        </p:spPr>
-        <p:txBody>
-          <a:bodyPr vert="horz" lIns="91440" tIns="45720" rIns="91440" bIns="45720" rtlCol="0"/>
-          <a:lstStyle>
-            <a:lvl1pPr algn="r">
-              <a:defRPr sz="1200"/>
-            </a:lvl1pPr>
-          </a:lstStyle>
-          <a:p>
-            <a:fld id="{5282F153-3F37-0F45-9E97-73ACFA13230C}" type="datetimeFigureOut">
-              <a:rPr lang="en-US"/>
-              <a:t>7/23/19</a:t>
-            </a:fld>
-            <a:endParaRPr lang="en-US"/>
-          </a:p>
-        </p:txBody>
-      </p:sp>
-      <p:sp>
-        <p:nvSpPr>
-          <p:cNvPr id="4" name="Slide Image Placeholder 3"/>
-          <p:cNvSpPr>
-            <a:spLocks noGrp="1" noRot="1" noChangeAspect="1"/>
-          </p:cNvSpPr>
-          <p:nvPr>
-            <p:ph type="sldImg" idx="2"/>
-          </p:nvPr>
-        </p:nvSpPr>
-        <p:spPr>
-          <a:xfrm>
-            <a:off x="685800" y="1143000"/>
-            <a:ext cx="5486400" cy="3086100"/>
-          </a:xfrm>
-          <a:prstGeom prst="rect">
-            <a:avLst/>
-          </a:prstGeom>
-          <a:noFill/>
-          <a:ln w="12700">
-            <a:solidFill>
-              <a:prstClr val="black"/>
-            </a:solidFill>
-          </a:ln>
-        </p:spPr>
-        <p:txBody>
-          <a:bodyPr vert="horz" lIns="91440" tIns="45720" rIns="91440" bIns="45720" rtlCol="0" anchor="ctr"/>
-          <a:lstStyle/>
-          <a:p>
-            <a:endParaRPr lang="en-US"/>
-          </a:p>
-        </p:txBody>
-      </p:sp>
-      <p:sp>
-        <p:nvSpPr>
-          <p:cNvPr id="5" name="Notes Placeholder 4"/>
-          <p:cNvSpPr>
-            <a:spLocks noGrp="1"/>
-          </p:cNvSpPr>
-          <p:nvPr>
-            <p:ph type="body" sz="quarter" idx="3"/>
-          </p:nvPr>
-        </p:nvSpPr>
-        <p:spPr>
-          <a:xfrm>
-            <a:off x="685800" y="4400550"/>
-            <a:ext cx="5486400" cy="3600450"/>
-          </a:xfrm>
-          <a:prstGeom prst="rect">
-            <a:avLst/>
-          </a:prstGeom>
-        </p:spPr>
-        <p:txBody>
-          <a:bodyPr vert="horz" lIns="91440" tIns="45720" rIns="91440" bIns="45720" rtlCol="0"/>
-          <a:lstStyle/>
-          <a:p>
-            <a:pPr lvl="0"/>
-            <a:r>
-              <a:rPr lang="en-US"/>
-              <a:t>Click to edit Master text styles</a:t>
-            </a:r>
-          </a:p>
-          <a:p>
-            <a:pPr lvl="1"/>
-            <a:r>
-              <a:rPr lang="en-US"/>
-              <a:t>Second level</a:t>
-            </a:r>
-          </a:p>
-          <a:p>
-            <a:pPr lvl="2"/>
-            <a:r>
-              <a:rPr lang="en-US"/>
-              <a:t>Third level</a:t>
-            </a:r>
-          </a:p>
-          <a:p>
-            <a:pPr lvl="3"/>
-            <a:r>
-              <a:rPr lang="en-US"/>
-              <a:t>Fourth level</a:t>
-            </a:r>
-          </a:p>
-          <a:p>
-            <a:pPr lvl="4"/>
-            <a:r>
-              <a:rPr lang="en-US"/>
-              <a:t>Fifth level</a:t>
-            </a:r>
-          </a:p>
-        </p:txBody>
-      </p:sp>
-      <p:sp>
-        <p:nvSpPr>
-          <p:cNvPr id="6" name="Footer Placeholder 5"/>
-          <p:cNvSpPr>
-            <a:spLocks noGrp="1"/>
-          </p:cNvSpPr>
-          <p:nvPr>
-            <p:ph type="ftr" sz="quarter" idx="4"/>
-          </p:nvPr>
-        </p:nvSpPr>
-        <p:spPr>
-          <a:xfrm>
-            <a:off x="0" y="8685213"/>
-            <a:ext cx="2971800" cy="458787"/>
-          </a:xfrm>
-          <a:prstGeom prst="rect">
-            <a:avLst/>
-          </a:prstGeom>
-        </p:spPr>
-        <p:txBody>
-          <a:bodyPr vert="horz" lIns="91440" tIns="45720" rIns="91440" bIns="45720" rtlCol="0" anchor="b"/>
-          <a:lstStyle>
-            <a:lvl1pPr algn="l">
-              <a:defRPr sz="1200"/>
-            </a:lvl1pPr>
-          </a:lstStyle>
-          <a:p>
-            <a:endParaRPr lang="en-US"/>
-          </a:p>
-        </p:txBody>
-      </p:sp>
-      <p:sp>
-        <p:nvSpPr>
-          <p:cNvPr id="7" name="Slide Number Placeholder 6"/>
-          <p:cNvSpPr>
-            <a:spLocks noGrp="1"/>
-          </p:cNvSpPr>
-          <p:nvPr>
-            <p:ph type="sldNum" sz="quarter" idx="5"/>
-          </p:nvPr>
-        </p:nvSpPr>
-        <p:spPr>
-          <a:xfrm>
-            <a:off x="3884613" y="8685213"/>
-            <a:ext cx="2971800" cy="458787"/>
-          </a:xfrm>
-          <a:prstGeom prst="rect">
-            <a:avLst/>
-          </a:prstGeom>
-        </p:spPr>
-        <p:txBody>
-          <a:bodyPr vert="horz" lIns="91440" tIns="45720" rIns="91440" bIns="45720" rtlCol="0" anchor="b"/>
-          <a:lstStyle>
-            <a:lvl1pPr algn="r">
-              <a:defRPr sz="1200"/>
-            </a:lvl1pPr>
-          </a:lstStyle>
-          <a:p>
-            <a:fld id="{CE5E9CC1-C706-0F49-92D6-E571CC5EEA8F}" type="slidenum">
-              <a:rPr lang="en-US"/>
-              <a:t>‹#›</a:t>
-            </a:fld>
-            <a:endParaRPr lang="en-US"/>
-          </a:p>
-        </p:txBody>
-      </p:sp>
     </p:spTree>
     <p:extLst>
       <p:ext uri="{BB962C8B-B14F-4D97-AF65-F5344CB8AC3E}">
-        <p14:creationId xmlns:p14="http://schemas.microsoft.com/office/powerpoint/2010/main" val="1024086991"/>
+        <p14:creationId xmlns:p14="http://schemas.microsoft.com/office/powerpoint/2010/main" val="139261968"/>
       </p:ext>
     </p:extLst>
   </p:cSld>
@@ -1114,7 +927,6 @@
               <a:rPr lang="en-US" dirty="0"/>
               <a:t>Company Brain answers questions over an institution's own data, entirely offline on a 4 GB laptop GPU. 88.9% on a 208-question benchmark, every number reproducible from the repo.</a:t>
             </a:r>
-            <a:endParaRPr lang="en-US" dirty="0"/>
           </a:p>
         </p:txBody>
       </p:sp>
@@ -1202,7 +1014,6 @@
               <a:rPr lang="en-US" dirty="0"/>
               <a:t>The deployment story matters as much as accuracy: cheap hardware, no egress, tenant isolation, and an operator console.</a:t>
             </a:r>
-            <a:endParaRPr lang="en-US" dirty="0"/>
           </a:p>
         </p:txBody>
       </p:sp>
@@ -1290,7 +1101,6 @@
               <a:rPr lang="en-US" dirty="0"/>
               <a:t>Stating the scope limits plainly is what makes the rest of the numbers credible under questioning.</a:t>
             </a:r>
-            <a:endParaRPr lang="en-US" dirty="0"/>
           </a:p>
         </p:txBody>
       </p:sp>
@@ -1378,7 +1188,6 @@
               <a:rPr lang="en-US" dirty="0"/>
               <a:t>Close on reproducibility: the repo contains the harness, the benchmark, the validator and the rejected experiments.</a:t>
             </a:r>
-            <a:endParaRPr lang="en-US" dirty="0"/>
           </a:p>
         </p:txBody>
       </p:sp>
@@ -1466,7 +1275,6 @@
               <a:rPr lang="en-US" dirty="0"/>
               <a:t>Four kinds of question need four kinds of retrieval. Standard RAG collapses them into one, and the cost shows up on relational questions: 8 correct out of 54.</a:t>
             </a:r>
-            <a:endParaRPr lang="en-US" dirty="0"/>
           </a:p>
         </p:txBody>
       </p:sp>
@@ -1554,7 +1362,6 @@
               <a:rPr lang="en-US" dirty="0"/>
               <a:t>The router sends each question to the store that can answer it. Deterministic rules run before any LLM call, so the common shapes are fast and reproducible.</a:t>
             </a:r>
-            <a:endParaRPr lang="en-US" dirty="0"/>
           </a:p>
         </p:txBody>
       </p:sp>
@@ -1642,7 +1449,6 @@
               <a:rPr lang="en-US" dirty="0"/>
               <a:t>62.5% for naive RAG, 69.7% for a GraphRAG-style design, 88.9% for ours — identical corpus, model, hardware and scorer.</a:t>
             </a:r>
-            <a:endParaRPr lang="en-US" dirty="0"/>
           </a:p>
         </p:txBody>
       </p:sp>
@@ -1730,7 +1536,6 @@
               <a:rPr lang="en-US" dirty="0"/>
               <a:t>Graph and vector retrieval fail in disjoint places. The hybrid keeps the chunk gains and recovers the three questions chunks alone lose.</a:t>
             </a:r>
-            <a:endParaRPr lang="en-US" dirty="0"/>
           </a:p>
         </p:txBody>
       </p:sp>
@@ -1818,7 +1623,6 @@
               <a:rPr lang="en-US" dirty="0"/>
               <a:t>Accuracy alone hides the behaviours that matter in an institution: refusing to guess, exact figures, provenance, and speed on cheap hardware.</a:t>
             </a:r>
-            <a:endParaRPr lang="en-US" dirty="0"/>
           </a:p>
         </p:txBody>
       </p:sp>
@@ -1906,7 +1710,6 @@
               <a:rPr lang="en-US" dirty="0"/>
               <a:t>Each of these contradicted the obvious plan. All three came from measurement rather than intuition.</a:t>
             </a:r>
-            <a:endParaRPr lang="en-US" dirty="0"/>
           </a:p>
         </p:txBody>
       </p:sp>
@@ -1994,7 +1797,6 @@
               <a:rPr lang="en-US" dirty="0"/>
               <a:t>Most RAG demos are scored on questions written after seeing the answers. Ours are generated from the same world model that renders the corpus, and validated before use.</a:t>
             </a:r>
-            <a:endParaRPr lang="en-US" dirty="0"/>
           </a:p>
         </p:txBody>
       </p:sp>
@@ -2082,7 +1884,6 @@
               <a:rPr lang="en-US" dirty="0"/>
               <a:t>The rejected experiments are the credibility asset. One passed its first run and failed replication — the gate caught it.</a:t>
             </a:r>
-            <a:endParaRPr lang="en-US" dirty="0"/>
           </a:p>
         </p:txBody>
       </p:sp>
@@ -2155,6 +1956,11 @@
 <file path=ppt/slideMasters/slideMaster1.xml><?xml version="1.0" encoding="utf-8"?>
 <p:sldMaster xmlns:a="http://schemas.openxmlformats.org/drawingml/2006/main" xmlns:r="http://schemas.openxmlformats.org/officeDocument/2006/relationships" xmlns:p="http://schemas.openxmlformats.org/presentationml/2006/main">
   <p:cSld>
+    <p:bg>
+      <p:bgRef idx="1001">
+        <a:schemeClr val="bg1"/>
+      </p:bgRef>
+    </p:bg>
     <p:spTree>
       <p:nvGrpSpPr>
         <p:cNvPr id="1" name=""/>
@@ -2437,6 +2243,7 @@
         <a:solidFill>
           <a:srgbClr val="121C33"/>
         </a:solidFill>
+        <a:effectLst/>
       </p:bgPr>
     </p:bg>
     <p:spTree>
@@ -2477,6 +2284,13 @@
             <a:prstDash val="solid"/>
           </a:ln>
         </p:spPr>
+        <p:txBody>
+          <a:bodyPr/>
+          <a:lstStyle/>
+          <a:p>
+            <a:endParaRPr lang="en-IN"/>
+          </a:p>
+        </p:txBody>
       </p:sp>
       <p:sp>
         <p:nvSpPr>
@@ -2502,6 +2316,13 @@
             <a:prstDash val="solid"/>
           </a:ln>
         </p:spPr>
+        <p:txBody>
+          <a:bodyPr/>
+          <a:lstStyle/>
+          <a:p>
+            <a:endParaRPr lang="en-IN"/>
+          </a:p>
+        </p:txBody>
       </p:sp>
       <p:sp>
         <p:nvSpPr>
@@ -2524,11 +2345,11 @@
           <a:bodyPr wrap="square" lIns="0" tIns="0" rIns="0" bIns="0" rtlCol="0" anchor="ctr"/>
           <a:lstStyle/>
           <a:p>
-            <a:pPr indent="0" marL="0">
-              <a:buNone/>
-            </a:pPr>
-            <a:r>
-              <a:rPr lang="en-US" sz="1300" b="1" spc="300" kern="0" dirty="0">
+            <a:pPr marL="0" indent="0">
+              <a:buNone/>
+            </a:pPr>
+            <a:r>
+              <a:rPr lang="en-US" sz="1300" b="1" kern="0" spc="300" dirty="0">
                 <a:solidFill>
                   <a:srgbClr val="2EC27E"/>
                 </a:solidFill>
@@ -2563,7 +2384,7 @@
           <a:bodyPr wrap="square" lIns="0" tIns="0" rIns="0" bIns="0" rtlCol="0" anchor="ctr"/>
           <a:lstStyle/>
           <a:p>
-            <a:pPr indent="0" marL="0">
+            <a:pPr marL="0" indent="0">
               <a:lnSpc>
                 <a:spcPts val="4400"/>
               </a:lnSpc>
@@ -2583,7 +2404,7 @@
             <a:endParaRPr lang="en-US" sz="4000" dirty="0"/>
           </a:p>
           <a:p>
-            <a:pPr indent="0" marL="0">
+            <a:pPr marL="0" indent="0">
               <a:lnSpc>
                 <a:spcPts val="4400"/>
               </a:lnSpc>
@@ -2625,7 +2446,7 @@
           <a:bodyPr wrap="square" lIns="0" tIns="0" rIns="0" bIns="0" rtlCol="0" anchor="ctr"/>
           <a:lstStyle/>
           <a:p>
-            <a:pPr indent="0" marL="0">
+            <a:pPr marL="0" indent="0">
               <a:buNone/>
             </a:pPr>
             <a:r>
@@ -2664,7 +2485,7 @@
           <a:bodyPr wrap="square" lIns="0" tIns="0" rIns="0" bIns="0" rtlCol="0" anchor="ctr"/>
           <a:lstStyle/>
           <a:p>
-            <a:pPr indent="0" marL="0">
+            <a:pPr marL="0" indent="0">
               <a:buNone/>
             </a:pPr>
             <a:r>
@@ -2703,7 +2524,7 @@
           <a:bodyPr wrap="square" lIns="0" tIns="0" rIns="0" bIns="0" rtlCol="0" anchor="ctr"/>
           <a:lstStyle/>
           <a:p>
-            <a:pPr indent="0" marL="0">
+            <a:pPr marL="0" indent="0">
               <a:buNone/>
             </a:pPr>
             <a:r>
@@ -2742,7 +2563,7 @@
           <a:bodyPr wrap="square" lIns="0" tIns="0" rIns="0" bIns="0" rtlCol="0" anchor="ctr"/>
           <a:lstStyle/>
           <a:p>
-            <a:pPr indent="0" marL="0">
+            <a:pPr marL="0" indent="0">
               <a:buNone/>
             </a:pPr>
             <a:r>
@@ -2781,7 +2602,7 @@
           <a:bodyPr wrap="square" lIns="0" tIns="0" rIns="0" bIns="0" rtlCol="0" anchor="ctr"/>
           <a:lstStyle/>
           <a:p>
-            <a:pPr indent="0" marL="0">
+            <a:pPr marL="0" indent="0">
               <a:buNone/>
             </a:pPr>
             <a:r>
@@ -2820,7 +2641,7 @@
           <a:bodyPr wrap="square" lIns="0" tIns="0" rIns="0" bIns="0" rtlCol="0" anchor="ctr"/>
           <a:lstStyle/>
           <a:p>
-            <a:pPr indent="0" marL="0">
+            <a:pPr marL="0" indent="0">
               <a:buNone/>
             </a:pPr>
             <a:r>
@@ -2859,7 +2680,7 @@
           <a:bodyPr wrap="square" lIns="0" tIns="0" rIns="0" bIns="0" rtlCol="0" anchor="ctr"/>
           <a:lstStyle/>
           <a:p>
-            <a:pPr indent="0" marL="0">
+            <a:pPr marL="0" indent="0">
               <a:buNone/>
             </a:pPr>
             <a:r>
@@ -2898,7 +2719,7 @@
           <a:bodyPr wrap="square" lIns="0" tIns="0" rIns="0" bIns="0" rtlCol="0" anchor="ctr"/>
           <a:lstStyle/>
           <a:p>
-            <a:pPr indent="0" marL="0">
+            <a:pPr marL="0" indent="0">
               <a:buNone/>
             </a:pPr>
             <a:r>
@@ -2937,7 +2758,7 @@
           <a:bodyPr wrap="square" lIns="0" tIns="0" rIns="0" bIns="0" rtlCol="0" anchor="ctr"/>
           <a:lstStyle/>
           <a:p>
-            <a:pPr indent="0" marL="0">
+            <a:pPr marL="0" indent="0">
               <a:buNone/>
             </a:pPr>
             <a:r>
@@ -2971,6 +2792,7 @@
         <a:solidFill>
           <a:srgbClr val="F7F9FC"/>
         </a:solidFill>
+        <a:effectLst/>
       </p:bgPr>
     </p:bg>
     <p:spTree>
@@ -3008,11 +2830,11 @@
           <a:bodyPr wrap="square" lIns="0" tIns="0" rIns="0" bIns="0" rtlCol="0" anchor="ctr"/>
           <a:lstStyle/>
           <a:p>
-            <a:pPr indent="0" marL="0">
-              <a:buNone/>
-            </a:pPr>
-            <a:r>
-              <a:rPr lang="en-US" sz="1100" b="1" spc="200" kern="0" dirty="0">
+            <a:pPr marL="0" indent="0">
+              <a:buNone/>
+            </a:pPr>
+            <a:r>
+              <a:rPr lang="en-US" sz="1100" b="1" kern="0" spc="200" dirty="0">
                 <a:solidFill>
                   <a:srgbClr val="2EC27E"/>
                 </a:solidFill>
@@ -3047,7 +2869,7 @@
           <a:bodyPr wrap="square" lIns="0" tIns="0" rIns="0" bIns="0" rtlCol="0" anchor="ctr"/>
           <a:lstStyle/>
           <a:p>
-            <a:pPr indent="0" marL="0">
+            <a:pPr marL="0" indent="0">
               <a:buNone/>
             </a:pPr>
             <a:r>
@@ -3089,6 +2911,13 @@
             <a:prstDash val="solid"/>
           </a:ln>
         </p:spPr>
+        <p:txBody>
+          <a:bodyPr/>
+          <a:lstStyle/>
+          <a:p>
+            <a:endParaRPr lang="en-IN"/>
+          </a:p>
+        </p:txBody>
       </p:sp>
       <p:sp>
         <p:nvSpPr>
@@ -3111,7 +2940,7 @@
           <a:bodyPr wrap="square" lIns="0" tIns="0" rIns="0" bIns="0" rtlCol="0" anchor="ctr"/>
           <a:lstStyle/>
           <a:p>
-            <a:pPr indent="0" marL="0">
+            <a:pPr marL="0" indent="0">
               <a:buNone/>
             </a:pPr>
             <a:r>
@@ -3150,7 +2979,7 @@
           <a:bodyPr wrap="square" lIns="0" tIns="0" rIns="0" bIns="0" rtlCol="0" anchor="ctr"/>
           <a:lstStyle/>
           <a:p>
-            <a:pPr indent="0" marL="0">
+            <a:pPr marL="0" indent="0">
               <a:buNone/>
             </a:pPr>
             <a:r>
@@ -3192,6 +3021,13 @@
             <a:prstDash val="solid"/>
           </a:ln>
         </p:spPr>
+        <p:txBody>
+          <a:bodyPr/>
+          <a:lstStyle/>
+          <a:p>
+            <a:endParaRPr lang="en-IN"/>
+          </a:p>
+        </p:txBody>
       </p:sp>
       <p:sp>
         <p:nvSpPr>
@@ -3214,7 +3050,7 @@
           <a:bodyPr wrap="square" lIns="0" tIns="0" rIns="0" bIns="0" rtlCol="0" anchor="ctr"/>
           <a:lstStyle/>
           <a:p>
-            <a:pPr indent="0" marL="0">
+            <a:pPr marL="0" indent="0">
               <a:buNone/>
             </a:pPr>
             <a:r>
@@ -3253,7 +3089,7 @@
           <a:bodyPr wrap="square" lIns="0" tIns="0" rIns="0" bIns="0" rtlCol="0" anchor="ctr"/>
           <a:lstStyle/>
           <a:p>
-            <a:pPr indent="0" marL="0">
+            <a:pPr marL="0" indent="0">
               <a:buNone/>
             </a:pPr>
             <a:r>
@@ -3295,6 +3131,13 @@
             <a:prstDash val="solid"/>
           </a:ln>
         </p:spPr>
+        <p:txBody>
+          <a:bodyPr/>
+          <a:lstStyle/>
+          <a:p>
+            <a:endParaRPr lang="en-IN"/>
+          </a:p>
+        </p:txBody>
       </p:sp>
       <p:sp>
         <p:nvSpPr>
@@ -3317,7 +3160,7 @@
           <a:bodyPr wrap="square" lIns="0" tIns="0" rIns="0" bIns="0" rtlCol="0" anchor="ctr"/>
           <a:lstStyle/>
           <a:p>
-            <a:pPr indent="0" marL="0">
+            <a:pPr marL="0" indent="0">
               <a:buNone/>
             </a:pPr>
             <a:r>
@@ -3356,7 +3199,7 @@
           <a:bodyPr wrap="square" lIns="0" tIns="0" rIns="0" bIns="0" rtlCol="0" anchor="ctr"/>
           <a:lstStyle/>
           <a:p>
-            <a:pPr indent="0" marL="0">
+            <a:pPr marL="0" indent="0">
               <a:buNone/>
             </a:pPr>
             <a:r>
@@ -3398,6 +3241,13 @@
             <a:prstDash val="solid"/>
           </a:ln>
         </p:spPr>
+        <p:txBody>
+          <a:bodyPr/>
+          <a:lstStyle/>
+          <a:p>
+            <a:endParaRPr lang="en-IN"/>
+          </a:p>
+        </p:txBody>
       </p:sp>
       <p:sp>
         <p:nvSpPr>
@@ -3420,7 +3270,7 @@
           <a:bodyPr wrap="square" lIns="0" tIns="0" rIns="0" bIns="0" rtlCol="0" anchor="ctr"/>
           <a:lstStyle/>
           <a:p>
-            <a:pPr indent="0" marL="0">
+            <a:pPr marL="0" indent="0">
               <a:buNone/>
             </a:pPr>
             <a:r>
@@ -3459,7 +3309,7 @@
           <a:bodyPr wrap="square" lIns="0" tIns="0" rIns="0" bIns="0" rtlCol="0" anchor="ctr"/>
           <a:lstStyle/>
           <a:p>
-            <a:pPr indent="0" marL="0">
+            <a:pPr marL="0" indent="0">
               <a:buNone/>
             </a:pPr>
             <a:r>
@@ -3501,6 +3351,13 @@
             <a:prstDash val="solid"/>
           </a:ln>
         </p:spPr>
+        <p:txBody>
+          <a:bodyPr/>
+          <a:lstStyle/>
+          <a:p>
+            <a:endParaRPr lang="en-IN"/>
+          </a:p>
+        </p:txBody>
       </p:sp>
       <p:sp>
         <p:nvSpPr>
@@ -3523,7 +3380,7 @@
           <a:bodyPr wrap="square" lIns="0" tIns="0" rIns="0" bIns="0" rtlCol="0" anchor="ctr"/>
           <a:lstStyle/>
           <a:p>
-            <a:pPr indent="0" marL="0">
+            <a:pPr marL="0" indent="0">
               <a:buNone/>
             </a:pPr>
             <a:r>
@@ -3562,7 +3419,7 @@
           <a:bodyPr wrap="square" lIns="0" tIns="0" rIns="0" bIns="0" rtlCol="0" anchor="ctr"/>
           <a:lstStyle/>
           <a:p>
-            <a:pPr indent="0" marL="0">
+            <a:pPr marL="0" indent="0">
               <a:buNone/>
             </a:pPr>
             <a:r>
@@ -3604,6 +3461,13 @@
             <a:prstDash val="solid"/>
           </a:ln>
         </p:spPr>
+        <p:txBody>
+          <a:bodyPr/>
+          <a:lstStyle/>
+          <a:p>
+            <a:endParaRPr lang="en-IN"/>
+          </a:p>
+        </p:txBody>
       </p:sp>
       <p:sp>
         <p:nvSpPr>
@@ -3626,7 +3490,7 @@
           <a:bodyPr wrap="square" lIns="0" tIns="0" rIns="0" bIns="0" rtlCol="0" anchor="ctr"/>
           <a:lstStyle/>
           <a:p>
-            <a:pPr indent="0" marL="0">
+            <a:pPr marL="0" indent="0">
               <a:buNone/>
             </a:pPr>
             <a:r>
@@ -3665,7 +3529,7 @@
           <a:bodyPr wrap="square" lIns="0" tIns="0" rIns="0" bIns="0" rtlCol="0" anchor="ctr"/>
           <a:lstStyle/>
           <a:p>
-            <a:pPr indent="0" marL="0">
+            <a:pPr marL="0" indent="0">
               <a:buNone/>
             </a:pPr>
             <a:r>
@@ -3709,6 +3573,13 @@
             <a:prstDash val="solid"/>
           </a:ln>
         </p:spPr>
+        <p:txBody>
+          <a:bodyPr/>
+          <a:lstStyle/>
+          <a:p>
+            <a:endParaRPr lang="en-IN"/>
+          </a:p>
+        </p:txBody>
       </p:sp>
       <p:sp>
         <p:nvSpPr>
@@ -3731,7 +3602,7 @@
           <a:bodyPr wrap="square" lIns="0" tIns="0" rIns="0" bIns="0" rtlCol="0" anchor="ctr"/>
           <a:lstStyle/>
           <a:p>
-            <a:pPr indent="0" marL="0">
+            <a:pPr marL="0" indent="0">
               <a:buNone/>
             </a:pPr>
             <a:r>
@@ -3765,6 +3636,7 @@
         <a:solidFill>
           <a:srgbClr val="F7F9FC"/>
         </a:solidFill>
+        <a:effectLst/>
       </p:bgPr>
     </p:bg>
     <p:spTree>
@@ -3802,11 +3674,11 @@
           <a:bodyPr wrap="square" lIns="0" tIns="0" rIns="0" bIns="0" rtlCol="0" anchor="ctr"/>
           <a:lstStyle/>
           <a:p>
-            <a:pPr indent="0" marL="0">
-              <a:buNone/>
-            </a:pPr>
-            <a:r>
-              <a:rPr lang="en-US" sz="1100" b="1" spc="200" kern="0" dirty="0">
+            <a:pPr marL="0" indent="0">
+              <a:buNone/>
+            </a:pPr>
+            <a:r>
+              <a:rPr lang="en-US" sz="1100" b="1" kern="0" spc="200" dirty="0">
                 <a:solidFill>
                   <a:srgbClr val="2EC27E"/>
                 </a:solidFill>
@@ -3841,7 +3713,7 @@
           <a:bodyPr wrap="square" lIns="0" tIns="0" rIns="0" bIns="0" rtlCol="0" anchor="ctr"/>
           <a:lstStyle/>
           <a:p>
-            <a:pPr indent="0" marL="0">
+            <a:pPr marL="0" indent="0">
               <a:buNone/>
             </a:pPr>
             <a:r>
@@ -3885,6 +3757,13 @@
             <a:prstDash val="solid"/>
           </a:ln>
         </p:spPr>
+        <p:txBody>
+          <a:bodyPr/>
+          <a:lstStyle/>
+          <a:p>
+            <a:endParaRPr lang="en-IN"/>
+          </a:p>
+        </p:txBody>
       </p:sp>
       <p:sp>
         <p:nvSpPr>
@@ -3910,6 +3789,13 @@
             <a:prstDash val="solid"/>
           </a:ln>
         </p:spPr>
+        <p:txBody>
+          <a:bodyPr/>
+          <a:lstStyle/>
+          <a:p>
+            <a:endParaRPr lang="en-IN"/>
+          </a:p>
+        </p:txBody>
       </p:sp>
       <p:sp>
         <p:nvSpPr>
@@ -3932,7 +3818,7 @@
           <a:bodyPr wrap="square" lIns="0" tIns="0" rIns="0" bIns="0" rtlCol="0" anchor="ctr"/>
           <a:lstStyle/>
           <a:p>
-            <a:pPr indent="0" marL="0">
+            <a:pPr marL="0" indent="0">
               <a:buNone/>
             </a:pPr>
             <a:r>
@@ -3971,7 +3857,7 @@
           <a:bodyPr wrap="square" lIns="0" tIns="0" rIns="0" bIns="0" rtlCol="0" anchor="ctr"/>
           <a:lstStyle/>
           <a:p>
-            <a:pPr indent="0" marL="0">
+            <a:pPr marL="0" indent="0">
               <a:buNone/>
             </a:pPr>
             <a:r>
@@ -4015,6 +3901,13 @@
             <a:prstDash val="solid"/>
           </a:ln>
         </p:spPr>
+        <p:txBody>
+          <a:bodyPr/>
+          <a:lstStyle/>
+          <a:p>
+            <a:endParaRPr lang="en-IN"/>
+          </a:p>
+        </p:txBody>
       </p:sp>
       <p:sp>
         <p:nvSpPr>
@@ -4040,6 +3933,13 @@
             <a:prstDash val="solid"/>
           </a:ln>
         </p:spPr>
+        <p:txBody>
+          <a:bodyPr/>
+          <a:lstStyle/>
+          <a:p>
+            <a:endParaRPr lang="en-IN"/>
+          </a:p>
+        </p:txBody>
       </p:sp>
       <p:sp>
         <p:nvSpPr>
@@ -4062,7 +3962,7 @@
           <a:bodyPr wrap="square" lIns="0" tIns="0" rIns="0" bIns="0" rtlCol="0" anchor="ctr"/>
           <a:lstStyle/>
           <a:p>
-            <a:pPr indent="0" marL="0">
+            <a:pPr marL="0" indent="0">
               <a:buNone/>
             </a:pPr>
             <a:r>
@@ -4101,7 +4001,7 @@
           <a:bodyPr wrap="square" lIns="0" tIns="0" rIns="0" bIns="0" rtlCol="0" anchor="ctr"/>
           <a:lstStyle/>
           <a:p>
-            <a:pPr indent="0" marL="0">
+            <a:pPr marL="0" indent="0">
               <a:buNone/>
             </a:pPr>
             <a:r>
@@ -4145,6 +4045,13 @@
             <a:prstDash val="solid"/>
           </a:ln>
         </p:spPr>
+        <p:txBody>
+          <a:bodyPr/>
+          <a:lstStyle/>
+          <a:p>
+            <a:endParaRPr lang="en-IN"/>
+          </a:p>
+        </p:txBody>
       </p:sp>
       <p:sp>
         <p:nvSpPr>
@@ -4170,6 +4077,13 @@
             <a:prstDash val="solid"/>
           </a:ln>
         </p:spPr>
+        <p:txBody>
+          <a:bodyPr/>
+          <a:lstStyle/>
+          <a:p>
+            <a:endParaRPr lang="en-IN"/>
+          </a:p>
+        </p:txBody>
       </p:sp>
       <p:sp>
         <p:nvSpPr>
@@ -4192,7 +4106,7 @@
           <a:bodyPr wrap="square" lIns="0" tIns="0" rIns="0" bIns="0" rtlCol="0" anchor="ctr"/>
           <a:lstStyle/>
           <a:p>
-            <a:pPr indent="0" marL="0">
+            <a:pPr marL="0" indent="0">
               <a:buNone/>
             </a:pPr>
             <a:r>
@@ -4231,7 +4145,7 @@
           <a:bodyPr wrap="square" lIns="0" tIns="0" rIns="0" bIns="0" rtlCol="0" anchor="ctr"/>
           <a:lstStyle/>
           <a:p>
-            <a:pPr indent="0" marL="0">
+            <a:pPr marL="0" indent="0">
               <a:buNone/>
             </a:pPr>
             <a:r>
@@ -4275,6 +4189,13 @@
             <a:prstDash val="solid"/>
           </a:ln>
         </p:spPr>
+        <p:txBody>
+          <a:bodyPr/>
+          <a:lstStyle/>
+          <a:p>
+            <a:endParaRPr lang="en-IN"/>
+          </a:p>
+        </p:txBody>
       </p:sp>
       <p:sp>
         <p:nvSpPr>
@@ -4297,7 +4218,7 @@
           <a:bodyPr wrap="square" lIns="0" tIns="0" rIns="0" bIns="0" rtlCol="0" anchor="ctr"/>
           <a:lstStyle/>
           <a:p>
-            <a:pPr indent="0" marL="0">
+            <a:pPr marL="0" indent="0">
               <a:buNone/>
             </a:pPr>
             <a:r>
@@ -4336,7 +4257,7 @@
           <a:bodyPr wrap="square" lIns="0" tIns="0" rIns="0" bIns="0" rtlCol="0" anchor="ctr"/>
           <a:lstStyle/>
           <a:p>
-            <a:pPr indent="0" marL="0">
+            <a:pPr marL="0" indent="0">
               <a:buNone/>
             </a:pPr>
             <a:r>
@@ -4370,6 +4291,7 @@
         <a:solidFill>
           <a:srgbClr val="121C33"/>
         </a:solidFill>
+        <a:effectLst/>
       </p:bgPr>
     </p:bg>
     <p:spTree>
@@ -4394,7 +4316,7 @@
         </p:nvSpPr>
         <p:spPr>
           <a:xfrm>
-            <a:off x="-1645920" y="4023360"/>
+            <a:off x="-1048761" y="3867912"/>
             <a:ext cx="4754880" cy="4754880"/>
           </a:xfrm>
           <a:prstGeom prst="ellipse">
@@ -4410,6 +4332,13 @@
             <a:prstDash val="solid"/>
           </a:ln>
         </p:spPr>
+        <p:txBody>
+          <a:bodyPr/>
+          <a:lstStyle/>
+          <a:p>
+            <a:endParaRPr lang="en-IN"/>
+          </a:p>
+        </p:txBody>
       </p:sp>
       <p:sp>
         <p:nvSpPr>
@@ -4432,11 +4361,11 @@
           <a:bodyPr wrap="square" lIns="0" tIns="0" rIns="0" bIns="0" rtlCol="0" anchor="ctr"/>
           <a:lstStyle/>
           <a:p>
-            <a:pPr indent="0" marL="0">
-              <a:buNone/>
-            </a:pPr>
-            <a:r>
-              <a:rPr lang="en-US" sz="1300" b="1" spc="300" kern="0" dirty="0">
+            <a:pPr marL="0" indent="0">
+              <a:buNone/>
+            </a:pPr>
+            <a:r>
+              <a:rPr lang="en-US" sz="1300" b="1" kern="0" spc="300" dirty="0">
                 <a:solidFill>
                   <a:srgbClr val="2EC27E"/>
                 </a:solidFill>
@@ -4471,7 +4400,7 @@
           <a:bodyPr wrap="square" lIns="0" tIns="0" rIns="0" bIns="0" rtlCol="0" anchor="ctr"/>
           <a:lstStyle/>
           <a:p>
-            <a:pPr indent="0" marL="0">
+            <a:pPr marL="0" indent="0">
               <a:lnSpc>
                 <a:spcPts val="4200"/>
               </a:lnSpc>
@@ -4491,7 +4420,7 @@
             <a:endParaRPr lang="en-US" sz="3600" dirty="0"/>
           </a:p>
           <a:p>
-            <a:pPr indent="0" marL="0">
+            <a:pPr marL="0" indent="0">
               <a:lnSpc>
                 <a:spcPts val="4200"/>
               </a:lnSpc>
@@ -4511,7 +4440,7 @@
             <a:endParaRPr lang="en-US" sz="3600" dirty="0"/>
           </a:p>
           <a:p>
-            <a:pPr indent="0" marL="0">
+            <a:pPr marL="0" indent="0">
               <a:lnSpc>
                 <a:spcPts val="4200"/>
               </a:lnSpc>
@@ -4553,7 +4482,7 @@
           <a:bodyPr wrap="square" lIns="0" tIns="0" rIns="0" bIns="0" rtlCol="0" anchor="ctr"/>
           <a:lstStyle/>
           <a:p>
-            <a:pPr indent="0" marL="0">
+            <a:pPr marL="0" indent="0">
               <a:buNone/>
             </a:pPr>
             <a:r>
@@ -4592,7 +4521,7 @@
           <a:bodyPr wrap="square" lIns="0" tIns="0" rIns="0" bIns="0" rtlCol="0" anchor="ctr"/>
           <a:lstStyle/>
           <a:p>
-            <a:pPr indent="0" marL="0">
+            <a:pPr marL="0" indent="0">
               <a:buNone/>
             </a:pPr>
             <a:r>
@@ -4631,7 +4560,7 @@
           <a:bodyPr wrap="square" lIns="0" tIns="0" rIns="0" bIns="0" rtlCol="0" anchor="ctr"/>
           <a:lstStyle/>
           <a:p>
-            <a:pPr indent="0" marL="0">
+            <a:pPr marL="0" indent="0">
               <a:buNone/>
             </a:pPr>
             <a:r>
@@ -4670,7 +4599,7 @@
           <a:bodyPr wrap="square" lIns="0" tIns="0" rIns="0" bIns="0" rtlCol="0" anchor="ctr"/>
           <a:lstStyle/>
           <a:p>
-            <a:pPr indent="0" marL="0">
+            <a:pPr marL="0" indent="0">
               <a:buNone/>
             </a:pPr>
             <a:r>
@@ -4709,7 +4638,7 @@
           <a:bodyPr wrap="square" lIns="0" tIns="0" rIns="0" bIns="0" rtlCol="0" anchor="ctr"/>
           <a:lstStyle/>
           <a:p>
-            <a:pPr indent="0" marL="0">
+            <a:pPr marL="0" indent="0">
               <a:buNone/>
             </a:pPr>
             <a:r>
@@ -4748,7 +4677,7 @@
           <a:bodyPr wrap="square" lIns="0" tIns="0" rIns="0" bIns="0" rtlCol="0" anchor="ctr"/>
           <a:lstStyle/>
           <a:p>
-            <a:pPr indent="0" marL="0">
+            <a:pPr marL="0" indent="0">
               <a:buNone/>
             </a:pPr>
             <a:r>
@@ -4787,7 +4716,7 @@
           <a:bodyPr wrap="square" lIns="0" tIns="0" rIns="0" bIns="0" rtlCol="0" anchor="ctr"/>
           <a:lstStyle/>
           <a:p>
-            <a:pPr indent="0" marL="0">
+            <a:pPr marL="0" indent="0">
               <a:buNone/>
             </a:pPr>
             <a:r>
@@ -4826,7 +4755,7 @@
           <a:bodyPr wrap="square" lIns="0" tIns="0" rIns="0" bIns="0" rtlCol="0" anchor="ctr"/>
           <a:lstStyle/>
           <a:p>
-            <a:pPr indent="0" marL="0">
+            <a:pPr marL="0" indent="0">
               <a:buNone/>
             </a:pPr>
             <a:r>
@@ -4865,7 +4794,7 @@
           <a:bodyPr wrap="square" lIns="0" tIns="0" rIns="0" bIns="0" rtlCol="0" anchor="ctr"/>
           <a:lstStyle/>
           <a:p>
-            <a:pPr indent="0" marL="0">
+            <a:pPr marL="0" indent="0">
               <a:buNone/>
             </a:pPr>
             <a:r>
@@ -4904,7 +4833,7 @@
           <a:bodyPr wrap="square" lIns="0" tIns="0" rIns="0" bIns="0" rtlCol="0" anchor="ctr"/>
           <a:lstStyle/>
           <a:p>
-            <a:pPr indent="0" marL="0">
+            <a:pPr marL="0" indent="0">
               <a:buNone/>
             </a:pPr>
             <a:r>
@@ -4943,7 +4872,7 @@
           <a:bodyPr wrap="square" lIns="0" tIns="0" rIns="0" bIns="0" rtlCol="0" anchor="ctr"/>
           <a:lstStyle/>
           <a:p>
-            <a:pPr indent="0" marL="0">
+            <a:pPr marL="0" indent="0">
               <a:buNone/>
             </a:pPr>
             <a:r>
@@ -4977,6 +4906,7 @@
         <a:solidFill>
           <a:srgbClr val="F7F9FC"/>
         </a:solidFill>
+        <a:effectLst/>
       </p:bgPr>
     </p:bg>
     <p:spTree>
@@ -5014,11 +4944,11 @@
           <a:bodyPr wrap="square" lIns="0" tIns="0" rIns="0" bIns="0" rtlCol="0" anchor="ctr"/>
           <a:lstStyle/>
           <a:p>
-            <a:pPr indent="0" marL="0">
-              <a:buNone/>
-            </a:pPr>
-            <a:r>
-              <a:rPr lang="en-US" sz="1100" b="1" spc="200" kern="0" dirty="0">
+            <a:pPr marL="0" indent="0">
+              <a:buNone/>
+            </a:pPr>
+            <a:r>
+              <a:rPr lang="en-US" sz="1100" b="1" kern="0" spc="200" dirty="0">
                 <a:solidFill>
                   <a:srgbClr val="2EC27E"/>
                 </a:solidFill>
@@ -5053,7 +4983,7 @@
           <a:bodyPr wrap="square" lIns="0" tIns="0" rIns="0" bIns="0" rtlCol="0" anchor="ctr"/>
           <a:lstStyle/>
           <a:p>
-            <a:pPr indent="0" marL="0">
+            <a:pPr marL="0" indent="0">
               <a:buNone/>
             </a:pPr>
             <a:r>
@@ -5097,6 +5027,13 @@
             <a:prstDash val="solid"/>
           </a:ln>
         </p:spPr>
+        <p:txBody>
+          <a:bodyPr/>
+          <a:lstStyle/>
+          <a:p>
+            <a:endParaRPr lang="en-IN"/>
+          </a:p>
+        </p:txBody>
       </p:sp>
       <p:sp>
         <p:nvSpPr>
@@ -5122,6 +5059,13 @@
             <a:prstDash val="solid"/>
           </a:ln>
         </p:spPr>
+        <p:txBody>
+          <a:bodyPr/>
+          <a:lstStyle/>
+          <a:p>
+            <a:endParaRPr lang="en-IN"/>
+          </a:p>
+        </p:txBody>
       </p:sp>
       <p:sp>
         <p:nvSpPr>
@@ -5144,7 +5088,7 @@
           <a:bodyPr wrap="square" lIns="0" tIns="0" rIns="0" bIns="0" rtlCol="0" anchor="ctr"/>
           <a:lstStyle/>
           <a:p>
-            <a:pPr algn="ctr" indent="0" marL="0">
+            <a:pPr marL="0" indent="0" algn="ctr">
               <a:buNone/>
             </a:pPr>
             <a:r>
@@ -5183,7 +5127,7 @@
           <a:bodyPr wrap="square" lIns="0" tIns="0" rIns="0" bIns="0" rtlCol="0" anchor="ctr"/>
           <a:lstStyle/>
           <a:p>
-            <a:pPr indent="0" marL="0">
+            <a:pPr marL="0" indent="0">
               <a:buNone/>
             </a:pPr>
             <a:r>
@@ -5222,7 +5166,7 @@
           <a:bodyPr wrap="square" lIns="0" tIns="0" rIns="0" bIns="0" rtlCol="0" anchor="ctr"/>
           <a:lstStyle/>
           <a:p>
-            <a:pPr indent="0" marL="0">
+            <a:pPr marL="0" indent="0">
               <a:buNone/>
             </a:pPr>
             <a:r>
@@ -5266,6 +5210,13 @@
             <a:prstDash val="solid"/>
           </a:ln>
         </p:spPr>
+        <p:txBody>
+          <a:bodyPr/>
+          <a:lstStyle/>
+          <a:p>
+            <a:endParaRPr lang="en-IN"/>
+          </a:p>
+        </p:txBody>
       </p:sp>
       <p:sp>
         <p:nvSpPr>
@@ -5291,6 +5242,13 @@
             <a:prstDash val="solid"/>
           </a:ln>
         </p:spPr>
+        <p:txBody>
+          <a:bodyPr/>
+          <a:lstStyle/>
+          <a:p>
+            <a:endParaRPr lang="en-IN"/>
+          </a:p>
+        </p:txBody>
       </p:sp>
       <p:sp>
         <p:nvSpPr>
@@ -5313,7 +5271,7 @@
           <a:bodyPr wrap="square" lIns="0" tIns="0" rIns="0" bIns="0" rtlCol="0" anchor="ctr"/>
           <a:lstStyle/>
           <a:p>
-            <a:pPr algn="ctr" indent="0" marL="0">
+            <a:pPr marL="0" indent="0" algn="ctr">
               <a:buNone/>
             </a:pPr>
             <a:r>
@@ -5352,7 +5310,7 @@
           <a:bodyPr wrap="square" lIns="0" tIns="0" rIns="0" bIns="0" rtlCol="0" anchor="ctr"/>
           <a:lstStyle/>
           <a:p>
-            <a:pPr indent="0" marL="0">
+            <a:pPr marL="0" indent="0">
               <a:buNone/>
             </a:pPr>
             <a:r>
@@ -5391,7 +5349,7 @@
           <a:bodyPr wrap="square" lIns="0" tIns="0" rIns="0" bIns="0" rtlCol="0" anchor="ctr"/>
           <a:lstStyle/>
           <a:p>
-            <a:pPr indent="0" marL="0">
+            <a:pPr marL="0" indent="0">
               <a:buNone/>
             </a:pPr>
             <a:r>
@@ -5435,6 +5393,13 @@
             <a:prstDash val="solid"/>
           </a:ln>
         </p:spPr>
+        <p:txBody>
+          <a:bodyPr/>
+          <a:lstStyle/>
+          <a:p>
+            <a:endParaRPr lang="en-IN"/>
+          </a:p>
+        </p:txBody>
       </p:sp>
       <p:sp>
         <p:nvSpPr>
@@ -5460,6 +5425,13 @@
             <a:prstDash val="solid"/>
           </a:ln>
         </p:spPr>
+        <p:txBody>
+          <a:bodyPr/>
+          <a:lstStyle/>
+          <a:p>
+            <a:endParaRPr lang="en-IN"/>
+          </a:p>
+        </p:txBody>
       </p:sp>
       <p:sp>
         <p:nvSpPr>
@@ -5482,7 +5454,7 @@
           <a:bodyPr wrap="square" lIns="0" tIns="0" rIns="0" bIns="0" rtlCol="0" anchor="ctr"/>
           <a:lstStyle/>
           <a:p>
-            <a:pPr algn="ctr" indent="0" marL="0">
+            <a:pPr marL="0" indent="0" algn="ctr">
               <a:buNone/>
             </a:pPr>
             <a:r>
@@ -5521,7 +5493,7 @@
           <a:bodyPr wrap="square" lIns="0" tIns="0" rIns="0" bIns="0" rtlCol="0" anchor="ctr"/>
           <a:lstStyle/>
           <a:p>
-            <a:pPr indent="0" marL="0">
+            <a:pPr marL="0" indent="0">
               <a:buNone/>
             </a:pPr>
             <a:r>
@@ -5560,7 +5532,7 @@
           <a:bodyPr wrap="square" lIns="0" tIns="0" rIns="0" bIns="0" rtlCol="0" anchor="ctr"/>
           <a:lstStyle/>
           <a:p>
-            <a:pPr indent="0" marL="0">
+            <a:pPr marL="0" indent="0">
               <a:buNone/>
             </a:pPr>
             <a:r>
@@ -5604,6 +5576,13 @@
             <a:prstDash val="solid"/>
           </a:ln>
         </p:spPr>
+        <p:txBody>
+          <a:bodyPr/>
+          <a:lstStyle/>
+          <a:p>
+            <a:endParaRPr lang="en-IN"/>
+          </a:p>
+        </p:txBody>
       </p:sp>
       <p:sp>
         <p:nvSpPr>
@@ -5629,6 +5608,13 @@
             <a:prstDash val="solid"/>
           </a:ln>
         </p:spPr>
+        <p:txBody>
+          <a:bodyPr/>
+          <a:lstStyle/>
+          <a:p>
+            <a:endParaRPr lang="en-IN"/>
+          </a:p>
+        </p:txBody>
       </p:sp>
       <p:sp>
         <p:nvSpPr>
@@ -5651,7 +5637,7 @@
           <a:bodyPr wrap="square" lIns="0" tIns="0" rIns="0" bIns="0" rtlCol="0" anchor="ctr"/>
           <a:lstStyle/>
           <a:p>
-            <a:pPr algn="ctr" indent="0" marL="0">
+            <a:pPr marL="0" indent="0" algn="ctr">
               <a:buNone/>
             </a:pPr>
             <a:r>
@@ -5690,7 +5676,7 @@
           <a:bodyPr wrap="square" lIns="0" tIns="0" rIns="0" bIns="0" rtlCol="0" anchor="ctr"/>
           <a:lstStyle/>
           <a:p>
-            <a:pPr indent="0" marL="0">
+            <a:pPr marL="0" indent="0">
               <a:buNone/>
             </a:pPr>
             <a:r>
@@ -5729,7 +5715,7 @@
           <a:bodyPr wrap="square" lIns="0" tIns="0" rIns="0" bIns="0" rtlCol="0" anchor="ctr"/>
           <a:lstStyle/>
           <a:p>
-            <a:pPr indent="0" marL="0">
+            <a:pPr marL="0" indent="0">
               <a:buNone/>
             </a:pPr>
             <a:r>
@@ -5773,6 +5759,13 @@
             <a:prstDash val="solid"/>
           </a:ln>
         </p:spPr>
+        <p:txBody>
+          <a:bodyPr/>
+          <a:lstStyle/>
+          <a:p>
+            <a:endParaRPr lang="en-IN"/>
+          </a:p>
+        </p:txBody>
       </p:sp>
       <p:sp>
         <p:nvSpPr>
@@ -5795,7 +5788,7 @@
           <a:bodyPr wrap="square" lIns="0" tIns="0" rIns="0" bIns="0" rtlCol="0" anchor="ctr"/>
           <a:lstStyle/>
           <a:p>
-            <a:pPr indent="0" marL="0">
+            <a:pPr marL="0" indent="0">
               <a:buNone/>
             </a:pPr>
             <a:r>
@@ -5834,7 +5827,7 @@
           <a:bodyPr wrap="square" lIns="0" tIns="0" rIns="0" bIns="0" rtlCol="0" anchor="ctr"/>
           <a:lstStyle/>
           <a:p>
-            <a:pPr indent="0" marL="0">
+            <a:pPr marL="0" indent="0">
               <a:buNone/>
             </a:pPr>
             <a:r>
@@ -5873,7 +5866,7 @@
           <a:bodyPr wrap="square" lIns="0" tIns="0" rIns="0" bIns="0" rtlCol="0" anchor="ctr"/>
           <a:lstStyle/>
           <a:p>
-            <a:pPr algn="ctr" indent="0" marL="0">
+            <a:pPr marL="0" indent="0" algn="ctr">
               <a:buNone/>
             </a:pPr>
             <a:r>
@@ -5912,7 +5905,7 @@
           <a:bodyPr wrap="square" lIns="0" tIns="0" rIns="0" bIns="0" rtlCol="0" anchor="ctr"/>
           <a:lstStyle/>
           <a:p>
-            <a:pPr algn="ctr" indent="0" marL="0">
+            <a:pPr marL="0" indent="0" algn="ctr">
               <a:buNone/>
             </a:pPr>
             <a:r>
@@ -5946,6 +5939,7 @@
         <a:solidFill>
           <a:srgbClr val="F7F9FC"/>
         </a:solidFill>
+        <a:effectLst/>
       </p:bgPr>
     </p:bg>
     <p:spTree>
@@ -5983,11 +5977,11 @@
           <a:bodyPr wrap="square" lIns="0" tIns="0" rIns="0" bIns="0" rtlCol="0" anchor="ctr"/>
           <a:lstStyle/>
           <a:p>
-            <a:pPr indent="0" marL="0">
-              <a:buNone/>
-            </a:pPr>
-            <a:r>
-              <a:rPr lang="en-US" sz="1100" b="1" spc="200" kern="0" dirty="0">
+            <a:pPr marL="0" indent="0">
+              <a:buNone/>
+            </a:pPr>
+            <a:r>
+              <a:rPr lang="en-US" sz="1100" b="1" kern="0" spc="200" dirty="0">
                 <a:solidFill>
                   <a:srgbClr val="2EC27E"/>
                 </a:solidFill>
@@ -6022,7 +6016,7 @@
           <a:bodyPr wrap="square" lIns="0" tIns="0" rIns="0" bIns="0" rtlCol="0" anchor="ctr"/>
           <a:lstStyle/>
           <a:p>
-            <a:pPr indent="0" marL="0">
+            <a:pPr marL="0" indent="0">
               <a:buNone/>
             </a:pPr>
             <a:r>
@@ -6066,6 +6060,13 @@
             <a:prstDash val="solid"/>
           </a:ln>
         </p:spPr>
+        <p:txBody>
+          <a:bodyPr/>
+          <a:lstStyle/>
+          <a:p>
+            <a:endParaRPr lang="en-IN"/>
+          </a:p>
+        </p:txBody>
       </p:sp>
       <p:sp>
         <p:nvSpPr>
@@ -6088,7 +6089,7 @@
           <a:bodyPr wrap="square" lIns="0" tIns="0" rIns="0" bIns="0" rtlCol="0" anchor="ctr"/>
           <a:lstStyle/>
           <a:p>
-            <a:pPr algn="ctr" indent="0" marL="0">
+            <a:pPr marL="0" indent="0" algn="ctr">
               <a:buNone/>
             </a:pPr>
             <a:r>
@@ -6129,6 +6130,13 @@
             <a:tailEnd type="triangle"/>
           </a:ln>
         </p:spPr>
+        <p:txBody>
+          <a:bodyPr/>
+          <a:lstStyle/>
+          <a:p>
+            <a:endParaRPr lang="en-IN"/>
+          </a:p>
+        </p:txBody>
       </p:sp>
       <p:sp>
         <p:nvSpPr>
@@ -6156,6 +6164,13 @@
             <a:prstDash val="solid"/>
           </a:ln>
         </p:spPr>
+        <p:txBody>
+          <a:bodyPr/>
+          <a:lstStyle/>
+          <a:p>
+            <a:endParaRPr lang="en-IN"/>
+          </a:p>
+        </p:txBody>
       </p:sp>
       <p:sp>
         <p:nvSpPr>
@@ -6178,11 +6193,11 @@
           <a:bodyPr wrap="square" lIns="0" tIns="0" rIns="0" bIns="0" rtlCol="0" anchor="ctr"/>
           <a:lstStyle/>
           <a:p>
-            <a:pPr algn="ctr" indent="0" marL="0">
-              <a:buNone/>
-            </a:pPr>
-            <a:r>
-              <a:rPr lang="en-US" sz="1300" b="1" spc="150" kern="0" dirty="0">
+            <a:pPr marL="0" indent="0" algn="ctr">
+              <a:buNone/>
+            </a:pPr>
+            <a:r>
+              <a:rPr lang="en-US" sz="1300" b="1" kern="0" spc="150" dirty="0">
                 <a:solidFill>
                   <a:srgbClr val="FFFFFF"/>
                 </a:solidFill>
@@ -6217,7 +6232,7 @@
           <a:bodyPr wrap="square" lIns="0" tIns="0" rIns="0" bIns="0" rtlCol="0" anchor="ctr"/>
           <a:lstStyle/>
           <a:p>
-            <a:pPr algn="ctr" indent="0" marL="0">
+            <a:pPr marL="0" indent="0" algn="ctr">
               <a:buNone/>
             </a:pPr>
             <a:r>
@@ -6244,7 +6259,7 @@
         <p:spPr>
           <a:xfrm>
             <a:off x="6080760" y="3246120"/>
-            <a:ext cx="-4183380" cy="457200"/>
+            <a:ext cx="64008" cy="2002536"/>
           </a:xfrm>
           <a:prstGeom prst="line">
             <a:avLst/>
@@ -6258,6 +6273,13 @@
             <a:tailEnd type="triangle"/>
           </a:ln>
         </p:spPr>
+        <p:txBody>
+          <a:bodyPr/>
+          <a:lstStyle/>
+          <a:p>
+            <a:endParaRPr lang="en-IN"/>
+          </a:p>
+        </p:txBody>
       </p:sp>
       <p:sp>
         <p:nvSpPr>
@@ -6280,7 +6302,7 @@
           <a:bodyPr wrap="square" lIns="0" tIns="0" rIns="0" bIns="0" rtlCol="0" anchor="ctr"/>
           <a:lstStyle/>
           <a:p>
-            <a:pPr algn="ctr" indent="0" marL="0">
+            <a:pPr marL="0" indent="0" algn="ctr">
               <a:buNone/>
             </a:pPr>
             <a:r>
@@ -6297,7 +6319,7 @@
             <a:endParaRPr lang="en-US" sz="900" dirty="0"/>
           </a:p>
           <a:p>
-            <a:pPr algn="ctr" indent="0" marL="0">
+            <a:pPr marL="0" indent="0" algn="ctr">
               <a:buNone/>
             </a:pPr>
             <a:r>
@@ -6341,6 +6363,13 @@
             <a:prstDash val="solid"/>
           </a:ln>
         </p:spPr>
+        <p:txBody>
+          <a:bodyPr/>
+          <a:lstStyle/>
+          <a:p>
+            <a:endParaRPr lang="en-IN"/>
+          </a:p>
+        </p:txBody>
       </p:sp>
       <p:sp>
         <p:nvSpPr>
@@ -6363,7 +6392,7 @@
           <a:bodyPr wrap="square" lIns="0" tIns="0" rIns="0" bIns="0" rtlCol="0" anchor="ctr"/>
           <a:lstStyle/>
           <a:p>
-            <a:pPr algn="ctr" indent="0" marL="0">
+            <a:pPr marL="0" indent="0" algn="ctr">
               <a:buNone/>
             </a:pPr>
             <a:r>
@@ -6402,7 +6431,7 @@
           <a:bodyPr wrap="square" lIns="0" tIns="0" rIns="0" bIns="0" rtlCol="0" anchor="ctr"/>
           <a:lstStyle/>
           <a:p>
-            <a:pPr algn="ctr" indent="0" marL="0">
+            <a:pPr marL="0" indent="0" algn="ctr">
               <a:buNone/>
             </a:pPr>
             <a:r>
@@ -6443,6 +6472,13 @@
             <a:tailEnd type="triangle"/>
           </a:ln>
         </p:spPr>
+        <p:txBody>
+          <a:bodyPr/>
+          <a:lstStyle/>
+          <a:p>
+            <a:endParaRPr lang="en-IN"/>
+          </a:p>
+        </p:txBody>
       </p:sp>
       <p:sp>
         <p:nvSpPr>
@@ -6451,9 +6487,9 @@
           <p:nvPr/>
         </p:nvSpPr>
         <p:spPr>
-          <a:xfrm>
-            <a:off x="6080760" y="3246120"/>
-            <a:ext cx="-1385316" cy="457200"/>
+          <a:xfrm flipH="1">
+            <a:off x="5159837" y="3246120"/>
+            <a:ext cx="920923" cy="566928"/>
           </a:xfrm>
           <a:prstGeom prst="line">
             <a:avLst/>
@@ -6467,6 +6503,13 @@
             <a:tailEnd type="triangle"/>
           </a:ln>
         </p:spPr>
+        <p:txBody>
+          <a:bodyPr/>
+          <a:lstStyle/>
+          <a:p>
+            <a:endParaRPr lang="en-IN"/>
+          </a:p>
+        </p:txBody>
       </p:sp>
       <p:sp>
         <p:nvSpPr>
@@ -6489,7 +6532,7 @@
           <a:bodyPr wrap="square" lIns="0" tIns="0" rIns="0" bIns="0" rtlCol="0" anchor="ctr"/>
           <a:lstStyle/>
           <a:p>
-            <a:pPr algn="ctr" indent="0" marL="0">
+            <a:pPr marL="0" indent="0" algn="ctr">
               <a:buNone/>
             </a:pPr>
             <a:r>
@@ -6533,6 +6576,13 @@
             <a:prstDash val="solid"/>
           </a:ln>
         </p:spPr>
+        <p:txBody>
+          <a:bodyPr/>
+          <a:lstStyle/>
+          <a:p>
+            <a:endParaRPr lang="en-IN"/>
+          </a:p>
+        </p:txBody>
       </p:sp>
       <p:sp>
         <p:nvSpPr>
@@ -6555,7 +6605,7 @@
           <a:bodyPr wrap="square" lIns="0" tIns="0" rIns="0" bIns="0" rtlCol="0" anchor="ctr"/>
           <a:lstStyle/>
           <a:p>
-            <a:pPr algn="ctr" indent="0" marL="0">
+            <a:pPr marL="0" indent="0" algn="ctr">
               <a:buNone/>
             </a:pPr>
             <a:r>
@@ -6594,7 +6644,7 @@
           <a:bodyPr wrap="square" lIns="0" tIns="0" rIns="0" bIns="0" rtlCol="0" anchor="ctr"/>
           <a:lstStyle/>
           <a:p>
-            <a:pPr algn="ctr" indent="0" marL="0">
+            <a:pPr marL="0" indent="0" algn="ctr">
               <a:buNone/>
             </a:pPr>
             <a:r>
@@ -6635,6 +6685,13 @@
             <a:tailEnd type="triangle"/>
           </a:ln>
         </p:spPr>
+        <p:txBody>
+          <a:bodyPr/>
+          <a:lstStyle/>
+          <a:p>
+            <a:endParaRPr lang="en-IN"/>
+          </a:p>
+        </p:txBody>
       </p:sp>
       <p:sp>
         <p:nvSpPr>
@@ -6644,8 +6701,8 @@
         </p:nvSpPr>
         <p:spPr>
           <a:xfrm>
-            <a:off x="6080760" y="3246120"/>
-            <a:ext cx="1412748" cy="457200"/>
+            <a:off x="6080759" y="3246120"/>
+            <a:ext cx="1455273" cy="521208"/>
           </a:xfrm>
           <a:prstGeom prst="line">
             <a:avLst/>
@@ -6659,6 +6716,13 @@
             <a:tailEnd type="triangle"/>
           </a:ln>
         </p:spPr>
+        <p:txBody>
+          <a:bodyPr/>
+          <a:lstStyle/>
+          <a:p>
+            <a:endParaRPr lang="en-IN"/>
+          </a:p>
+        </p:txBody>
       </p:sp>
       <p:sp>
         <p:nvSpPr>
@@ -6681,7 +6745,7 @@
           <a:bodyPr wrap="square" lIns="0" tIns="0" rIns="0" bIns="0" rtlCol="0" anchor="ctr"/>
           <a:lstStyle/>
           <a:p>
-            <a:pPr algn="ctr" indent="0" marL="0">
+            <a:pPr marL="0" indent="0" algn="ctr">
               <a:buNone/>
             </a:pPr>
             <a:r>
@@ -6725,6 +6789,13 @@
             <a:prstDash val="solid"/>
           </a:ln>
         </p:spPr>
+        <p:txBody>
+          <a:bodyPr/>
+          <a:lstStyle/>
+          <a:p>
+            <a:endParaRPr lang="en-IN"/>
+          </a:p>
+        </p:txBody>
       </p:sp>
       <p:sp>
         <p:nvSpPr>
@@ -6747,7 +6818,7 @@
           <a:bodyPr wrap="square" lIns="0" tIns="0" rIns="0" bIns="0" rtlCol="0" anchor="ctr"/>
           <a:lstStyle/>
           <a:p>
-            <a:pPr algn="ctr" indent="0" marL="0">
+            <a:pPr marL="0" indent="0" algn="ctr">
               <a:buNone/>
             </a:pPr>
             <a:r>
@@ -6786,7 +6857,7 @@
           <a:bodyPr wrap="square" lIns="0" tIns="0" rIns="0" bIns="0" rtlCol="0" anchor="ctr"/>
           <a:lstStyle/>
           <a:p>
-            <a:pPr algn="ctr" indent="0" marL="0">
+            <a:pPr marL="0" indent="0" algn="ctr">
               <a:buNone/>
             </a:pPr>
             <a:r>
@@ -6813,7 +6884,7 @@
         <p:spPr>
           <a:xfrm>
             <a:off x="7493508" y="4873752"/>
-            <a:ext cx="-1412748" cy="384048"/>
+            <a:ext cx="0" cy="384048"/>
           </a:xfrm>
           <a:prstGeom prst="line">
             <a:avLst/>
@@ -6827,6 +6898,13 @@
             <a:tailEnd type="triangle"/>
           </a:ln>
         </p:spPr>
+        <p:txBody>
+          <a:bodyPr/>
+          <a:lstStyle/>
+          <a:p>
+            <a:endParaRPr lang="en-IN"/>
+          </a:p>
+        </p:txBody>
       </p:sp>
       <p:sp>
         <p:nvSpPr>
@@ -6851,6 +6929,13 @@
             <a:tailEnd type="triangle"/>
           </a:ln>
         </p:spPr>
+        <p:txBody>
+          <a:bodyPr/>
+          <a:lstStyle/>
+          <a:p>
+            <a:endParaRPr lang="en-IN"/>
+          </a:p>
+        </p:txBody>
       </p:sp>
       <p:sp>
         <p:nvSpPr>
@@ -6873,7 +6958,7 @@
           <a:bodyPr wrap="square" lIns="0" tIns="0" rIns="0" bIns="0" rtlCol="0" anchor="ctr"/>
           <a:lstStyle/>
           <a:p>
-            <a:pPr algn="ctr" indent="0" marL="0">
+            <a:pPr marL="0" indent="0" algn="ctr">
               <a:buNone/>
             </a:pPr>
             <a:r>
@@ -6917,6 +7002,13 @@
             <a:prstDash val="solid"/>
           </a:ln>
         </p:spPr>
+        <p:txBody>
+          <a:bodyPr/>
+          <a:lstStyle/>
+          <a:p>
+            <a:endParaRPr lang="en-IN"/>
+          </a:p>
+        </p:txBody>
       </p:sp>
       <p:sp>
         <p:nvSpPr>
@@ -6939,7 +7031,7 @@
           <a:bodyPr wrap="square" lIns="0" tIns="0" rIns="0" bIns="0" rtlCol="0" anchor="ctr"/>
           <a:lstStyle/>
           <a:p>
-            <a:pPr algn="ctr" indent="0" marL="0">
+            <a:pPr marL="0" indent="0" algn="ctr">
               <a:buNone/>
             </a:pPr>
             <a:r>
@@ -6978,7 +7070,7 @@
           <a:bodyPr wrap="square" lIns="0" tIns="0" rIns="0" bIns="0" rtlCol="0" anchor="ctr"/>
           <a:lstStyle/>
           <a:p>
-            <a:pPr algn="ctr" indent="0" marL="0">
+            <a:pPr marL="0" indent="0" algn="ctr">
               <a:buNone/>
             </a:pPr>
             <a:r>
@@ -7003,9 +7095,9 @@
           <p:nvPr/>
         </p:nvSpPr>
         <p:spPr>
-          <a:xfrm>
-            <a:off x="10291572" y="4873752"/>
-            <a:ext cx="-4210812" cy="384048"/>
+          <a:xfrm flipH="1">
+            <a:off x="7923276" y="4873752"/>
+            <a:ext cx="2368296" cy="393192"/>
           </a:xfrm>
           <a:prstGeom prst="line">
             <a:avLst/>
@@ -7019,6 +7111,13 @@
             <a:tailEnd type="triangle"/>
           </a:ln>
         </p:spPr>
+        <p:txBody>
+          <a:bodyPr/>
+          <a:lstStyle/>
+          <a:p>
+            <a:endParaRPr lang="en-IN"/>
+          </a:p>
+        </p:txBody>
       </p:sp>
       <p:sp>
         <p:nvSpPr>
@@ -7046,6 +7145,13 @@
             <a:prstDash val="solid"/>
           </a:ln>
         </p:spPr>
+        <p:txBody>
+          <a:bodyPr/>
+          <a:lstStyle/>
+          <a:p>
+            <a:endParaRPr lang="en-IN"/>
+          </a:p>
+        </p:txBody>
       </p:sp>
       <p:sp>
         <p:nvSpPr>
@@ -7068,7 +7174,7 @@
           <a:bodyPr wrap="square" lIns="0" tIns="0" rIns="0" bIns="0" rtlCol="0" anchor="ctr"/>
           <a:lstStyle/>
           <a:p>
-            <a:pPr algn="ctr" indent="0" marL="0">
+            <a:pPr marL="0" indent="0" algn="ctr">
               <a:buNone/>
             </a:pPr>
             <a:r>
@@ -7107,7 +7213,7 @@
           <a:bodyPr wrap="square" lIns="0" tIns="0" rIns="0" bIns="0" rtlCol="0" anchor="ctr"/>
           <a:lstStyle/>
           <a:p>
-            <a:pPr algn="ctr" indent="0" marL="0">
+            <a:pPr marL="0" indent="0" algn="ctr">
               <a:buNone/>
             </a:pPr>
             <a:r>
@@ -7146,7 +7252,7 @@
           <a:bodyPr wrap="square" lIns="0" tIns="0" rIns="0" bIns="0" rtlCol="0" anchor="ctr"/>
           <a:lstStyle/>
           <a:p>
-            <a:pPr indent="0" marL="0">
+            <a:pPr marL="0" indent="0">
               <a:buNone/>
             </a:pPr>
             <a:r>
@@ -7161,6 +7267,43 @@
               <a:t>Numeric answers come from SQL, not from a language model's recollection — the system cannot hallucinate a figure it computed.</a:t>
             </a:r>
             <a:endParaRPr lang="en-US" sz="1200" dirty="0"/>
+          </a:p>
+        </p:txBody>
+      </p:sp>
+      <p:sp>
+        <p:nvSpPr>
+          <p:cNvPr id="39" name="Shape 14">
+            <a:extLst>
+              <a:ext uri="{FF2B5EF4-FFF2-40B4-BE49-F238E27FC236}">
+                <a16:creationId xmlns:a16="http://schemas.microsoft.com/office/drawing/2014/main" id="{359C0A0B-B4E0-F167-E97B-C1DAB68B9CC3}"/>
+              </a:ext>
+            </a:extLst>
+          </p:cNvPr>
+          <p:cNvSpPr/>
+          <p:nvPr/>
+        </p:nvSpPr>
+        <p:spPr>
+          <a:xfrm flipH="1">
+            <a:off x="2290572" y="3236976"/>
+            <a:ext cx="1413992" cy="594360"/>
+          </a:xfrm>
+          <a:prstGeom prst="line">
+            <a:avLst/>
+          </a:prstGeom>
+          <a:noFill/>
+          <a:ln w="22225">
+            <a:solidFill>
+              <a:srgbClr val="8FA0C0"/>
+            </a:solidFill>
+            <a:prstDash val="solid"/>
+            <a:tailEnd type="triangle"/>
+          </a:ln>
+        </p:spPr>
+        <p:txBody>
+          <a:bodyPr/>
+          <a:lstStyle/>
+          <a:p>
+            <a:endParaRPr lang="en-IN"/>
           </a:p>
         </p:txBody>
       </p:sp>
@@ -7180,6 +7323,7 @@
         <a:solidFill>
           <a:srgbClr val="F7F9FC"/>
         </a:solidFill>
+        <a:effectLst/>
       </p:bgPr>
     </p:bg>
     <p:spTree>
@@ -7217,11 +7361,11 @@
           <a:bodyPr wrap="square" lIns="0" tIns="0" rIns="0" bIns="0" rtlCol="0" anchor="ctr"/>
           <a:lstStyle/>
           <a:p>
-            <a:pPr indent="0" marL="0">
-              <a:buNone/>
-            </a:pPr>
-            <a:r>
-              <a:rPr lang="en-US" sz="1100" b="1" spc="200" kern="0" dirty="0">
+            <a:pPr marL="0" indent="0">
+              <a:buNone/>
+            </a:pPr>
+            <a:r>
+              <a:rPr lang="en-US" sz="1100" b="1" kern="0" spc="200" dirty="0">
                 <a:solidFill>
                   <a:srgbClr val="2EC27E"/>
                 </a:solidFill>
@@ -7256,7 +7400,7 @@
           <a:bodyPr wrap="square" lIns="0" tIns="0" rIns="0" bIns="0" rtlCol="0" anchor="ctr"/>
           <a:lstStyle/>
           <a:p>
-            <a:pPr indent="0" marL="0">
+            <a:pPr marL="0" indent="0">
               <a:buNone/>
             </a:pPr>
             <a:r>
@@ -7276,7 +7420,7 @@
       </p:sp>
       <p:graphicFrame>
         <p:nvGraphicFramePr>
-          <p:cNvPr id="4" name="Chart 0" descr=""/>
+          <p:cNvPr id="4" name="Chart 0"/>
           <p:cNvGraphicFramePr/>
           <p:nvPr/>
         </p:nvGraphicFramePr>
@@ -7284,9 +7428,9 @@
           <a:off x="548640" y="1600200"/>
           <a:ext cx="6858000" cy="4160520"/>
         </p:xfrm>
-        <a:graphic xmlns:a="http://schemas.openxmlformats.org/drawingml/2006/main">
+        <a:graphic>
           <a:graphicData uri="http://schemas.openxmlformats.org/drawingml/2006/chart">
-            <c:chart xmlns:c="http://schemas.openxmlformats.org/drawingml/2006/chart" r:id="rId1"/>
+            <c:chart xmlns:c="http://schemas.openxmlformats.org/drawingml/2006/chart" xmlns:r="http://schemas.openxmlformats.org/officeDocument/2006/relationships" r:id="rId3"/>
           </a:graphicData>
         </a:graphic>
       </p:graphicFrame>
@@ -7316,13 +7460,20 @@
             <a:prstDash val="solid"/>
           </a:ln>
           <a:effectLst>
-            <a:outerShdw sx="100000" sy="100000" kx="0" ky="0" algn="bl" rotWithShape="0" blurRad="101600" dist="12700" dir="5400000">
+            <a:outerShdw blurRad="101600" dist="12700" dir="5400000" algn="bl" rotWithShape="0">
               <a:srgbClr val="AAB4CC">
                 <a:alpha val="25000"/>
               </a:srgbClr>
             </a:outerShdw>
           </a:effectLst>
         </p:spPr>
+        <p:txBody>
+          <a:bodyPr/>
+          <a:lstStyle/>
+          <a:p>
+            <a:endParaRPr lang="en-IN"/>
+          </a:p>
+        </p:txBody>
       </p:sp>
       <p:sp>
         <p:nvSpPr>
@@ -7345,7 +7496,7 @@
           <a:bodyPr wrap="square" lIns="0" tIns="0" rIns="0" bIns="0" rtlCol="0" anchor="ctr"/>
           <a:lstStyle/>
           <a:p>
-            <a:pPr algn="ctr" indent="0" marL="0">
+            <a:pPr marL="0" indent="0" algn="ctr">
               <a:buNone/>
             </a:pPr>
             <a:r>
@@ -7384,7 +7535,7 @@
           <a:bodyPr wrap="square" lIns="0" tIns="0" rIns="0" bIns="0" rtlCol="0" anchor="ctr"/>
           <a:lstStyle/>
           <a:p>
-            <a:pPr algn="ctr" indent="0" marL="0">
+            <a:pPr marL="0" indent="0" algn="ctr">
               <a:buNone/>
             </a:pPr>
             <a:r>
@@ -7428,13 +7579,20 @@
             <a:prstDash val="solid"/>
           </a:ln>
           <a:effectLst>
-            <a:outerShdw sx="100000" sy="100000" kx="0" ky="0" algn="bl" rotWithShape="0" blurRad="101600" dist="12700" dir="5400000">
+            <a:outerShdw blurRad="101600" dist="12700" dir="5400000" algn="bl" rotWithShape="0">
               <a:srgbClr val="AAB4CC">
                 <a:alpha val="25000"/>
               </a:srgbClr>
             </a:outerShdw>
           </a:effectLst>
         </p:spPr>
+        <p:txBody>
+          <a:bodyPr/>
+          <a:lstStyle/>
+          <a:p>
+            <a:endParaRPr lang="en-IN"/>
+          </a:p>
+        </p:txBody>
       </p:sp>
       <p:sp>
         <p:nvSpPr>
@@ -7457,7 +7615,7 @@
           <a:bodyPr wrap="square" lIns="0" tIns="0" rIns="0" bIns="0" rtlCol="0" anchor="ctr"/>
           <a:lstStyle/>
           <a:p>
-            <a:pPr algn="ctr" indent="0" marL="0">
+            <a:pPr marL="0" indent="0" algn="ctr">
               <a:buNone/>
             </a:pPr>
             <a:r>
@@ -7496,7 +7654,7 @@
           <a:bodyPr wrap="square" lIns="0" tIns="0" rIns="0" bIns="0" rtlCol="0" anchor="ctr"/>
           <a:lstStyle/>
           <a:p>
-            <a:pPr algn="ctr" indent="0" marL="0">
+            <a:pPr marL="0" indent="0" algn="ctr">
               <a:buNone/>
             </a:pPr>
             <a:r>
@@ -7540,6 +7698,13 @@
             <a:prstDash val="solid"/>
           </a:ln>
         </p:spPr>
+        <p:txBody>
+          <a:bodyPr/>
+          <a:lstStyle/>
+          <a:p>
+            <a:endParaRPr lang="en-IN"/>
+          </a:p>
+        </p:txBody>
       </p:sp>
       <p:sp>
         <p:nvSpPr>
@@ -7562,7 +7727,7 @@
           <a:bodyPr wrap="square" lIns="0" tIns="0" rIns="0" bIns="0" rtlCol="0" anchor="ctr"/>
           <a:lstStyle/>
           <a:p>
-            <a:pPr indent="0" marL="0">
+            <a:pPr marL="0" indent="0">
               <a:buNone/>
             </a:pPr>
             <a:r>
@@ -7601,7 +7766,7 @@
           <a:bodyPr wrap="square" lIns="0" tIns="0" rIns="0" bIns="0" rtlCol="0" anchor="ctr"/>
           <a:lstStyle/>
           <a:p>
-            <a:pPr indent="0" marL="0">
+            <a:pPr marL="0" indent="0">
               <a:lnSpc>
                 <a:spcPts val="1500"/>
               </a:lnSpc>
@@ -7621,7 +7786,7 @@
             <a:endParaRPr lang="en-US" sz="1100" dirty="0"/>
           </a:p>
           <a:p>
-            <a:pPr indent="0" marL="0">
+            <a:pPr marL="0" indent="0">
               <a:lnSpc>
                 <a:spcPts val="1500"/>
               </a:lnSpc>
@@ -7641,7 +7806,7 @@
             <a:endParaRPr lang="en-US" sz="1100" dirty="0"/>
           </a:p>
           <a:p>
-            <a:pPr indent="0" marL="0">
+            <a:pPr marL="0" indent="0">
               <a:lnSpc>
                 <a:spcPts val="1500"/>
               </a:lnSpc>
@@ -7678,6 +7843,7 @@
         <a:solidFill>
           <a:srgbClr val="F7F9FC"/>
         </a:solidFill>
+        <a:effectLst/>
       </p:bgPr>
     </p:bg>
     <p:spTree>
@@ -7715,11 +7881,11 @@
           <a:bodyPr wrap="square" lIns="0" tIns="0" rIns="0" bIns="0" rtlCol="0" anchor="ctr"/>
           <a:lstStyle/>
           <a:p>
-            <a:pPr indent="0" marL="0">
-              <a:buNone/>
-            </a:pPr>
-            <a:r>
-              <a:rPr lang="en-US" sz="1100" b="1" spc="200" kern="0" dirty="0">
+            <a:pPr marL="0" indent="0">
+              <a:buNone/>
+            </a:pPr>
+            <a:r>
+              <a:rPr lang="en-US" sz="1100" b="1" kern="0" spc="200" dirty="0">
                 <a:solidFill>
                   <a:srgbClr val="2EC27E"/>
                 </a:solidFill>
@@ -7754,7 +7920,7 @@
           <a:bodyPr wrap="square" lIns="0" tIns="0" rIns="0" bIns="0" rtlCol="0" anchor="ctr"/>
           <a:lstStyle/>
           <a:p>
-            <a:pPr indent="0" marL="0">
+            <a:pPr marL="0" indent="0">
               <a:buNone/>
             </a:pPr>
             <a:r>
@@ -7774,7 +7940,7 @@
       </p:sp>
       <p:graphicFrame>
         <p:nvGraphicFramePr>
-          <p:cNvPr id="4" name="Chart 0" descr=""/>
+          <p:cNvPr id="4" name="Chart 0"/>
           <p:cNvGraphicFramePr/>
           <p:nvPr/>
         </p:nvGraphicFramePr>
@@ -7782,9 +7948,9 @@
           <a:off x="548640" y="1645920"/>
           <a:ext cx="6949440" cy="3977640"/>
         </p:xfrm>
-        <a:graphic xmlns:a="http://schemas.openxmlformats.org/drawingml/2006/main">
+        <a:graphic>
           <a:graphicData uri="http://schemas.openxmlformats.org/drawingml/2006/chart">
-            <c:chart xmlns:c="http://schemas.openxmlformats.org/drawingml/2006/chart" r:id="rId1"/>
+            <c:chart xmlns:c="http://schemas.openxmlformats.org/drawingml/2006/chart" xmlns:r="http://schemas.openxmlformats.org/officeDocument/2006/relationships" r:id="rId3"/>
           </a:graphicData>
         </a:graphic>
       </p:graphicFrame>
@@ -7809,7 +7975,7 @@
           <a:bodyPr wrap="square" lIns="0" tIns="0" rIns="0" bIns="0" rtlCol="0" anchor="ctr"/>
           <a:lstStyle/>
           <a:p>
-            <a:pPr indent="0" marL="0">
+            <a:pPr marL="0" indent="0">
               <a:buNone/>
             </a:pPr>
             <a:r>
@@ -7959,13 +8125,20 @@
             <a:prstDash val="solid"/>
           </a:ln>
           <a:effectLst>
-            <a:outerShdw sx="100000" sy="100000" kx="0" ky="0" algn="bl" rotWithShape="0" blurRad="101600" dist="12700" dir="5400000">
+            <a:outerShdw blurRad="101600" dist="12700" dir="5400000" algn="bl" rotWithShape="0">
               <a:srgbClr val="AAB4CC">
                 <a:alpha val="25000"/>
               </a:srgbClr>
             </a:outerShdw>
           </a:effectLst>
         </p:spPr>
+        <p:txBody>
+          <a:bodyPr/>
+          <a:lstStyle/>
+          <a:p>
+            <a:endParaRPr lang="en-IN"/>
+          </a:p>
+        </p:txBody>
       </p:sp>
       <p:sp>
         <p:nvSpPr>
@@ -7988,7 +8161,7 @@
           <a:bodyPr wrap="square" lIns="0" tIns="0" rIns="0" bIns="0" rtlCol="0" anchor="ctr"/>
           <a:lstStyle/>
           <a:p>
-            <a:pPr algn="ctr" indent="0" marL="0">
+            <a:pPr marL="0" indent="0" algn="ctr">
               <a:buNone/>
             </a:pPr>
             <a:r>
@@ -8027,7 +8200,7 @@
           <a:bodyPr wrap="square" lIns="0" tIns="0" rIns="0" bIns="0" rtlCol="0" anchor="ctr"/>
           <a:lstStyle/>
           <a:p>
-            <a:pPr algn="ctr" indent="0" marL="0">
+            <a:pPr marL="0" indent="0" algn="ctr">
               <a:buNone/>
             </a:pPr>
             <a:r>
@@ -8061,6 +8234,7 @@
         <a:solidFill>
           <a:srgbClr val="F7F9FC"/>
         </a:solidFill>
+        <a:effectLst/>
       </p:bgPr>
     </p:bg>
     <p:spTree>
@@ -8098,11 +8272,11 @@
           <a:bodyPr wrap="square" lIns="0" tIns="0" rIns="0" bIns="0" rtlCol="0" anchor="ctr"/>
           <a:lstStyle/>
           <a:p>
-            <a:pPr indent="0" marL="0">
-              <a:buNone/>
-            </a:pPr>
-            <a:r>
-              <a:rPr lang="en-US" sz="1100" b="1" spc="200" kern="0" dirty="0">
+            <a:pPr marL="0" indent="0">
+              <a:buNone/>
+            </a:pPr>
+            <a:r>
+              <a:rPr lang="en-US" sz="1100" b="1" kern="0" spc="200" dirty="0">
                 <a:solidFill>
                   <a:srgbClr val="2EC27E"/>
                 </a:solidFill>
@@ -8137,7 +8311,7 @@
           <a:bodyPr wrap="square" lIns="0" tIns="0" rIns="0" bIns="0" rtlCol="0" anchor="ctr"/>
           <a:lstStyle/>
           <a:p>
-            <a:pPr indent="0" marL="0">
+            <a:pPr marL="0" indent="0">
               <a:buNone/>
             </a:pPr>
             <a:r>
@@ -8181,13 +8355,20 @@
             <a:prstDash val="solid"/>
           </a:ln>
           <a:effectLst>
-            <a:outerShdw sx="100000" sy="100000" kx="0" ky="0" algn="bl" rotWithShape="0" blurRad="101600" dist="12700" dir="5400000">
+            <a:outerShdw blurRad="101600" dist="12700" dir="5400000" algn="bl" rotWithShape="0">
               <a:srgbClr val="AAB4CC">
                 <a:alpha val="25000"/>
               </a:srgbClr>
             </a:outerShdw>
           </a:effectLst>
         </p:spPr>
+        <p:txBody>
+          <a:bodyPr/>
+          <a:lstStyle/>
+          <a:p>
+            <a:endParaRPr lang="en-IN"/>
+          </a:p>
+        </p:txBody>
       </p:sp>
       <p:sp>
         <p:nvSpPr>
@@ -8210,7 +8391,7 @@
           <a:bodyPr wrap="square" lIns="0" tIns="0" rIns="0" bIns="0" rtlCol="0" anchor="ctr"/>
           <a:lstStyle/>
           <a:p>
-            <a:pPr algn="ctr" indent="0" marL="0">
+            <a:pPr marL="0" indent="0" algn="ctr">
               <a:buNone/>
             </a:pPr>
             <a:r>
@@ -8249,7 +8430,7 @@
           <a:bodyPr wrap="square" lIns="0" tIns="0" rIns="0" bIns="0" rtlCol="0" anchor="ctr"/>
           <a:lstStyle/>
           <a:p>
-            <a:pPr algn="ctr" indent="0" marL="0">
+            <a:pPr marL="0" indent="0" algn="ctr">
               <a:buNone/>
             </a:pPr>
             <a:r>
@@ -8266,7 +8447,7 @@
             <a:endParaRPr lang="en-US" sz="1150" dirty="0"/>
           </a:p>
           <a:p>
-            <a:pPr algn="ctr" indent="0" marL="0">
+            <a:pPr marL="0" indent="0" algn="ctr">
               <a:buNone/>
             </a:pPr>
             <a:r>
@@ -8310,13 +8491,20 @@
             <a:prstDash val="solid"/>
           </a:ln>
           <a:effectLst>
-            <a:outerShdw sx="100000" sy="100000" kx="0" ky="0" algn="bl" rotWithShape="0" blurRad="101600" dist="12700" dir="5400000">
+            <a:outerShdw blurRad="101600" dist="12700" dir="5400000" algn="bl" rotWithShape="0">
               <a:srgbClr val="AAB4CC">
                 <a:alpha val="25000"/>
               </a:srgbClr>
             </a:outerShdw>
           </a:effectLst>
         </p:spPr>
+        <p:txBody>
+          <a:bodyPr/>
+          <a:lstStyle/>
+          <a:p>
+            <a:endParaRPr lang="en-IN"/>
+          </a:p>
+        </p:txBody>
       </p:sp>
       <p:sp>
         <p:nvSpPr>
@@ -8339,7 +8527,7 @@
           <a:bodyPr wrap="square" lIns="0" tIns="0" rIns="0" bIns="0" rtlCol="0" anchor="ctr"/>
           <a:lstStyle/>
           <a:p>
-            <a:pPr algn="ctr" indent="0" marL="0">
+            <a:pPr marL="0" indent="0" algn="ctr">
               <a:buNone/>
             </a:pPr>
             <a:r>
@@ -8378,7 +8566,7 @@
           <a:bodyPr wrap="square" lIns="0" tIns="0" rIns="0" bIns="0" rtlCol="0" anchor="ctr"/>
           <a:lstStyle/>
           <a:p>
-            <a:pPr algn="ctr" indent="0" marL="0">
+            <a:pPr marL="0" indent="0" algn="ctr">
               <a:buNone/>
             </a:pPr>
             <a:r>
@@ -8395,7 +8583,7 @@
             <a:endParaRPr lang="en-US" sz="1150" dirty="0"/>
           </a:p>
           <a:p>
-            <a:pPr algn="ctr" indent="0" marL="0">
+            <a:pPr marL="0" indent="0" algn="ctr">
               <a:buNone/>
             </a:pPr>
             <a:r>
@@ -8439,13 +8627,20 @@
             <a:prstDash val="solid"/>
           </a:ln>
           <a:effectLst>
-            <a:outerShdw sx="100000" sy="100000" kx="0" ky="0" algn="bl" rotWithShape="0" blurRad="101600" dist="12700" dir="5400000">
+            <a:outerShdw blurRad="101600" dist="12700" dir="5400000" algn="bl" rotWithShape="0">
               <a:srgbClr val="AAB4CC">
                 <a:alpha val="25000"/>
               </a:srgbClr>
             </a:outerShdw>
           </a:effectLst>
         </p:spPr>
+        <p:txBody>
+          <a:bodyPr/>
+          <a:lstStyle/>
+          <a:p>
+            <a:endParaRPr lang="en-IN"/>
+          </a:p>
+        </p:txBody>
       </p:sp>
       <p:sp>
         <p:nvSpPr>
@@ -8468,7 +8663,7 @@
           <a:bodyPr wrap="square" lIns="0" tIns="0" rIns="0" bIns="0" rtlCol="0" anchor="ctr"/>
           <a:lstStyle/>
           <a:p>
-            <a:pPr algn="ctr" indent="0" marL="0">
+            <a:pPr marL="0" indent="0" algn="ctr">
               <a:buNone/>
             </a:pPr>
             <a:r>
@@ -8507,7 +8702,7 @@
           <a:bodyPr wrap="square" lIns="0" tIns="0" rIns="0" bIns="0" rtlCol="0" anchor="ctr"/>
           <a:lstStyle/>
           <a:p>
-            <a:pPr algn="ctr" indent="0" marL="0">
+            <a:pPr marL="0" indent="0" algn="ctr">
               <a:buNone/>
             </a:pPr>
             <a:r>
@@ -8524,7 +8719,7 @@
             <a:endParaRPr lang="en-US" sz="1150" dirty="0"/>
           </a:p>
           <a:p>
-            <a:pPr algn="ctr" indent="0" marL="0">
+            <a:pPr marL="0" indent="0" algn="ctr">
               <a:buNone/>
             </a:pPr>
             <a:r>
@@ -8568,13 +8763,20 @@
             <a:prstDash val="solid"/>
           </a:ln>
           <a:effectLst>
-            <a:outerShdw sx="100000" sy="100000" kx="0" ky="0" algn="bl" rotWithShape="0" blurRad="101600" dist="12700" dir="5400000">
+            <a:outerShdw blurRad="101600" dist="12700" dir="5400000" algn="bl" rotWithShape="0">
               <a:srgbClr val="AAB4CC">
                 <a:alpha val="25000"/>
               </a:srgbClr>
             </a:outerShdw>
           </a:effectLst>
         </p:spPr>
+        <p:txBody>
+          <a:bodyPr/>
+          <a:lstStyle/>
+          <a:p>
+            <a:endParaRPr lang="en-IN"/>
+          </a:p>
+        </p:txBody>
       </p:sp>
       <p:sp>
         <p:nvSpPr>
@@ -8597,7 +8799,7 @@
           <a:bodyPr wrap="square" lIns="0" tIns="0" rIns="0" bIns="0" rtlCol="0" anchor="ctr"/>
           <a:lstStyle/>
           <a:p>
-            <a:pPr algn="ctr" indent="0" marL="0">
+            <a:pPr marL="0" indent="0" algn="ctr">
               <a:buNone/>
             </a:pPr>
             <a:r>
@@ -8636,7 +8838,7 @@
           <a:bodyPr wrap="square" lIns="0" tIns="0" rIns="0" bIns="0" rtlCol="0" anchor="ctr"/>
           <a:lstStyle/>
           <a:p>
-            <a:pPr algn="ctr" indent="0" marL="0">
+            <a:pPr marL="0" indent="0" algn="ctr">
               <a:buNone/>
             </a:pPr>
             <a:r>
@@ -8653,7 +8855,7 @@
             <a:endParaRPr lang="en-US" sz="1150" dirty="0"/>
           </a:p>
           <a:p>
-            <a:pPr algn="ctr" indent="0" marL="0">
+            <a:pPr marL="0" indent="0" algn="ctr">
               <a:buNone/>
             </a:pPr>
             <a:r>
@@ -8697,13 +8899,20 @@
             <a:prstDash val="solid"/>
           </a:ln>
           <a:effectLst>
-            <a:outerShdw sx="100000" sy="100000" kx="0" ky="0" algn="bl" rotWithShape="0" blurRad="101600" dist="12700" dir="5400000">
+            <a:outerShdw blurRad="101600" dist="12700" dir="5400000" algn="bl" rotWithShape="0">
               <a:srgbClr val="AAB4CC">
                 <a:alpha val="25000"/>
               </a:srgbClr>
             </a:outerShdw>
           </a:effectLst>
         </p:spPr>
+        <p:txBody>
+          <a:bodyPr/>
+          <a:lstStyle/>
+          <a:p>
+            <a:endParaRPr lang="en-IN"/>
+          </a:p>
+        </p:txBody>
       </p:sp>
       <p:sp>
         <p:nvSpPr>
@@ -8726,7 +8935,7 @@
           <a:bodyPr wrap="square" lIns="0" tIns="0" rIns="0" bIns="0" rtlCol="0" anchor="ctr"/>
           <a:lstStyle/>
           <a:p>
-            <a:pPr algn="ctr" indent="0" marL="0">
+            <a:pPr marL="0" indent="0" algn="ctr">
               <a:buNone/>
             </a:pPr>
             <a:r>
@@ -8765,7 +8974,7 @@
           <a:bodyPr wrap="square" lIns="0" tIns="0" rIns="0" bIns="0" rtlCol="0" anchor="ctr"/>
           <a:lstStyle/>
           <a:p>
-            <a:pPr algn="ctr" indent="0" marL="0">
+            <a:pPr marL="0" indent="0" algn="ctr">
               <a:buNone/>
             </a:pPr>
             <a:r>
@@ -8782,7 +8991,7 @@
             <a:endParaRPr lang="en-US" sz="1150" dirty="0"/>
           </a:p>
           <a:p>
-            <a:pPr algn="ctr" indent="0" marL="0">
+            <a:pPr marL="0" indent="0" algn="ctr">
               <a:buNone/>
             </a:pPr>
             <a:r>
@@ -8826,13 +9035,20 @@
             <a:prstDash val="solid"/>
           </a:ln>
           <a:effectLst>
-            <a:outerShdw sx="100000" sy="100000" kx="0" ky="0" algn="bl" rotWithShape="0" blurRad="101600" dist="12700" dir="5400000">
+            <a:outerShdw blurRad="101600" dist="12700" dir="5400000" algn="bl" rotWithShape="0">
               <a:srgbClr val="AAB4CC">
                 <a:alpha val="25000"/>
               </a:srgbClr>
             </a:outerShdw>
           </a:effectLst>
         </p:spPr>
+        <p:txBody>
+          <a:bodyPr/>
+          <a:lstStyle/>
+          <a:p>
+            <a:endParaRPr lang="en-IN"/>
+          </a:p>
+        </p:txBody>
       </p:sp>
       <p:sp>
         <p:nvSpPr>
@@ -8855,7 +9071,7 @@
           <a:bodyPr wrap="square" lIns="0" tIns="0" rIns="0" bIns="0" rtlCol="0" anchor="ctr"/>
           <a:lstStyle/>
           <a:p>
-            <a:pPr algn="ctr" indent="0" marL="0">
+            <a:pPr marL="0" indent="0" algn="ctr">
               <a:buNone/>
             </a:pPr>
             <a:r>
@@ -8894,7 +9110,7 @@
           <a:bodyPr wrap="square" lIns="0" tIns="0" rIns="0" bIns="0" rtlCol="0" anchor="ctr"/>
           <a:lstStyle/>
           <a:p>
-            <a:pPr algn="ctr" indent="0" marL="0">
+            <a:pPr marL="0" indent="0" algn="ctr">
               <a:buNone/>
             </a:pPr>
             <a:r>
@@ -8911,7 +9127,7 @@
             <a:endParaRPr lang="en-US" sz="1150" dirty="0"/>
           </a:p>
           <a:p>
-            <a:pPr algn="ctr" indent="0" marL="0">
+            <a:pPr marL="0" indent="0" algn="ctr">
               <a:buNone/>
             </a:pPr>
             <a:r>
@@ -8950,7 +9166,7 @@
           <a:bodyPr wrap="square" lIns="0" tIns="0" rIns="0" bIns="0" rtlCol="0" anchor="ctr"/>
           <a:lstStyle/>
           <a:p>
-            <a:pPr indent="0" marL="0">
+            <a:pPr marL="0" indent="0">
               <a:buNone/>
             </a:pPr>
             <a:r>
@@ -8984,6 +9200,7 @@
         <a:solidFill>
           <a:srgbClr val="F7F9FC"/>
         </a:solidFill>
+        <a:effectLst/>
       </p:bgPr>
     </p:bg>
     <p:spTree>
@@ -9021,11 +9238,11 @@
           <a:bodyPr wrap="square" lIns="0" tIns="0" rIns="0" bIns="0" rtlCol="0" anchor="ctr"/>
           <a:lstStyle/>
           <a:p>
-            <a:pPr indent="0" marL="0">
-              <a:buNone/>
-            </a:pPr>
-            <a:r>
-              <a:rPr lang="en-US" sz="1100" b="1" spc="200" kern="0" dirty="0">
+            <a:pPr marL="0" indent="0">
+              <a:buNone/>
+            </a:pPr>
+            <a:r>
+              <a:rPr lang="en-US" sz="1100" b="1" kern="0" spc="200" dirty="0">
                 <a:solidFill>
                   <a:srgbClr val="2EC27E"/>
                 </a:solidFill>
@@ -9060,7 +9277,7 @@
           <a:bodyPr wrap="square" lIns="0" tIns="0" rIns="0" bIns="0" rtlCol="0" anchor="ctr"/>
           <a:lstStyle/>
           <a:p>
-            <a:pPr indent="0" marL="0">
+            <a:pPr marL="0" indent="0">
               <a:buNone/>
             </a:pPr>
             <a:r>
@@ -9104,6 +9321,13 @@
             <a:prstDash val="solid"/>
           </a:ln>
         </p:spPr>
+        <p:txBody>
+          <a:bodyPr/>
+          <a:lstStyle/>
+          <a:p>
+            <a:endParaRPr lang="en-IN"/>
+          </a:p>
+        </p:txBody>
       </p:sp>
       <p:sp>
         <p:nvSpPr>
@@ -9129,6 +9353,13 @@
             <a:prstDash val="solid"/>
           </a:ln>
         </p:spPr>
+        <p:txBody>
+          <a:bodyPr/>
+          <a:lstStyle/>
+          <a:p>
+            <a:endParaRPr lang="en-IN"/>
+          </a:p>
+        </p:txBody>
       </p:sp>
       <p:sp>
         <p:nvSpPr>
@@ -9151,7 +9382,7 @@
           <a:bodyPr wrap="square" lIns="0" tIns="0" rIns="0" bIns="0" rtlCol="0" anchor="ctr"/>
           <a:lstStyle/>
           <a:p>
-            <a:pPr algn="ctr" indent="0" marL="0">
+            <a:pPr marL="0" indent="0" algn="ctr">
               <a:buNone/>
             </a:pPr>
             <a:r>
@@ -9190,7 +9421,7 @@
           <a:bodyPr wrap="square" lIns="0" tIns="0" rIns="0" bIns="0" rtlCol="0" anchor="ctr"/>
           <a:lstStyle/>
           <a:p>
-            <a:pPr indent="0" marL="0">
+            <a:pPr marL="0" indent="0">
               <a:buNone/>
             </a:pPr>
             <a:r>
@@ -9229,7 +9460,7 @@
           <a:bodyPr wrap="square" lIns="0" tIns="0" rIns="0" bIns="0" rtlCol="0" anchor="ctr"/>
           <a:lstStyle/>
           <a:p>
-            <a:pPr indent="0" marL="0">
+            <a:pPr marL="0" indent="0">
               <a:buNone/>
             </a:pPr>
             <a:r>
@@ -9268,7 +9499,7 @@
           <a:bodyPr wrap="square" lIns="0" tIns="0" rIns="0" bIns="0" rtlCol="0" anchor="ctr"/>
           <a:lstStyle/>
           <a:p>
-            <a:pPr algn="ctr" indent="0" marL="0">
+            <a:pPr marL="0" indent="0" algn="ctr">
               <a:buNone/>
             </a:pPr>
             <a:r>
@@ -9312,6 +9543,13 @@
             <a:prstDash val="solid"/>
           </a:ln>
         </p:spPr>
+        <p:txBody>
+          <a:bodyPr/>
+          <a:lstStyle/>
+          <a:p>
+            <a:endParaRPr lang="en-IN"/>
+          </a:p>
+        </p:txBody>
       </p:sp>
       <p:sp>
         <p:nvSpPr>
@@ -9337,6 +9575,13 @@
             <a:prstDash val="solid"/>
           </a:ln>
         </p:spPr>
+        <p:txBody>
+          <a:bodyPr/>
+          <a:lstStyle/>
+          <a:p>
+            <a:endParaRPr lang="en-IN"/>
+          </a:p>
+        </p:txBody>
       </p:sp>
       <p:sp>
         <p:nvSpPr>
@@ -9359,7 +9604,7 @@
           <a:bodyPr wrap="square" lIns="0" tIns="0" rIns="0" bIns="0" rtlCol="0" anchor="ctr"/>
           <a:lstStyle/>
           <a:p>
-            <a:pPr algn="ctr" indent="0" marL="0">
+            <a:pPr marL="0" indent="0" algn="ctr">
               <a:buNone/>
             </a:pPr>
             <a:r>
@@ -9398,7 +9643,7 @@
           <a:bodyPr wrap="square" lIns="0" tIns="0" rIns="0" bIns="0" rtlCol="0" anchor="ctr"/>
           <a:lstStyle/>
           <a:p>
-            <a:pPr indent="0" marL="0">
+            <a:pPr marL="0" indent="0">
               <a:buNone/>
             </a:pPr>
             <a:r>
@@ -9437,7 +9682,7 @@
           <a:bodyPr wrap="square" lIns="0" tIns="0" rIns="0" bIns="0" rtlCol="0" anchor="ctr"/>
           <a:lstStyle/>
           <a:p>
-            <a:pPr indent="0" marL="0">
+            <a:pPr marL="0" indent="0">
               <a:buNone/>
             </a:pPr>
             <a:r>
@@ -9476,7 +9721,7 @@
           <a:bodyPr wrap="square" lIns="0" tIns="0" rIns="0" bIns="0" rtlCol="0" anchor="ctr"/>
           <a:lstStyle/>
           <a:p>
-            <a:pPr algn="ctr" indent="0" marL="0">
+            <a:pPr marL="0" indent="0" algn="ctr">
               <a:buNone/>
             </a:pPr>
             <a:r>
@@ -9520,6 +9765,13 @@
             <a:prstDash val="solid"/>
           </a:ln>
         </p:spPr>
+        <p:txBody>
+          <a:bodyPr/>
+          <a:lstStyle/>
+          <a:p>
+            <a:endParaRPr lang="en-IN"/>
+          </a:p>
+        </p:txBody>
       </p:sp>
       <p:sp>
         <p:nvSpPr>
@@ -9545,6 +9797,13 @@
             <a:prstDash val="solid"/>
           </a:ln>
         </p:spPr>
+        <p:txBody>
+          <a:bodyPr/>
+          <a:lstStyle/>
+          <a:p>
+            <a:endParaRPr lang="en-IN"/>
+          </a:p>
+        </p:txBody>
       </p:sp>
       <p:sp>
         <p:nvSpPr>
@@ -9567,7 +9826,7 @@
           <a:bodyPr wrap="square" lIns="0" tIns="0" rIns="0" bIns="0" rtlCol="0" anchor="ctr"/>
           <a:lstStyle/>
           <a:p>
-            <a:pPr algn="ctr" indent="0" marL="0">
+            <a:pPr marL="0" indent="0" algn="ctr">
               <a:buNone/>
             </a:pPr>
             <a:r>
@@ -9606,7 +9865,7 @@
           <a:bodyPr wrap="square" lIns="0" tIns="0" rIns="0" bIns="0" rtlCol="0" anchor="ctr"/>
           <a:lstStyle/>
           <a:p>
-            <a:pPr indent="0" marL="0">
+            <a:pPr marL="0" indent="0">
               <a:buNone/>
             </a:pPr>
             <a:r>
@@ -9645,7 +9904,7 @@
           <a:bodyPr wrap="square" lIns="0" tIns="0" rIns="0" bIns="0" rtlCol="0" anchor="ctr"/>
           <a:lstStyle/>
           <a:p>
-            <a:pPr indent="0" marL="0">
+            <a:pPr marL="0" indent="0">
               <a:buNone/>
             </a:pPr>
             <a:r>
@@ -9684,7 +9943,7 @@
           <a:bodyPr wrap="square" lIns="0" tIns="0" rIns="0" bIns="0" rtlCol="0" anchor="ctr"/>
           <a:lstStyle/>
           <a:p>
-            <a:pPr algn="ctr" indent="0" marL="0">
+            <a:pPr marL="0" indent="0" algn="ctr">
               <a:buNone/>
             </a:pPr>
             <a:r>
@@ -9718,6 +9977,7 @@
         <a:solidFill>
           <a:srgbClr val="F7F9FC"/>
         </a:solidFill>
+        <a:effectLst/>
       </p:bgPr>
     </p:bg>
     <p:spTree>
@@ -9755,11 +10015,11 @@
           <a:bodyPr wrap="square" lIns="0" tIns="0" rIns="0" bIns="0" rtlCol="0" anchor="ctr"/>
           <a:lstStyle/>
           <a:p>
-            <a:pPr indent="0" marL="0">
-              <a:buNone/>
-            </a:pPr>
-            <a:r>
-              <a:rPr lang="en-US" sz="1100" b="1" spc="200" kern="0" dirty="0">
+            <a:pPr marL="0" indent="0">
+              <a:buNone/>
+            </a:pPr>
+            <a:r>
+              <a:rPr lang="en-US" sz="1100" b="1" kern="0" spc="200" dirty="0">
                 <a:solidFill>
                   <a:srgbClr val="2EC27E"/>
                 </a:solidFill>
@@ -9794,7 +10054,7 @@
           <a:bodyPr wrap="square" lIns="0" tIns="0" rIns="0" bIns="0" rtlCol="0" anchor="ctr"/>
           <a:lstStyle/>
           <a:p>
-            <a:pPr indent="0" marL="0">
+            <a:pPr marL="0" indent="0">
               <a:buNone/>
             </a:pPr>
             <a:r>
@@ -9838,6 +10098,13 @@
             <a:prstDash val="solid"/>
           </a:ln>
         </p:spPr>
+        <p:txBody>
+          <a:bodyPr/>
+          <a:lstStyle/>
+          <a:p>
+            <a:endParaRPr lang="en-IN"/>
+          </a:p>
+        </p:txBody>
       </p:sp>
       <p:sp>
         <p:nvSpPr>
@@ -9860,7 +10127,7 @@
           <a:bodyPr wrap="square" lIns="0" tIns="0" rIns="0" bIns="0" rtlCol="0" anchor="ctr"/>
           <a:lstStyle/>
           <a:p>
-            <a:pPr algn="ctr" indent="0" marL="0">
+            <a:pPr marL="0" indent="0" algn="ctr">
               <a:buNone/>
             </a:pPr>
             <a:r>
@@ -9899,7 +10166,7 @@
           <a:bodyPr wrap="square" lIns="0" tIns="0" rIns="0" bIns="0" rtlCol="0" anchor="ctr"/>
           <a:lstStyle/>
           <a:p>
-            <a:pPr algn="ctr" indent="0" marL="0">
+            <a:pPr marL="0" indent="0" algn="ctr">
               <a:buNone/>
             </a:pPr>
             <a:r>
@@ -9940,6 +10207,13 @@
             <a:tailEnd type="triangle"/>
           </a:ln>
         </p:spPr>
+        <p:txBody>
+          <a:bodyPr/>
+          <a:lstStyle/>
+          <a:p>
+            <a:endParaRPr lang="en-IN"/>
+          </a:p>
+        </p:txBody>
       </p:sp>
       <p:sp>
         <p:nvSpPr>
@@ -9967,6 +10241,13 @@
             <a:prstDash val="solid"/>
           </a:ln>
         </p:spPr>
+        <p:txBody>
+          <a:bodyPr/>
+          <a:lstStyle/>
+          <a:p>
+            <a:endParaRPr lang="en-IN"/>
+          </a:p>
+        </p:txBody>
       </p:sp>
       <p:sp>
         <p:nvSpPr>
@@ -9989,7 +10270,7 @@
           <a:bodyPr wrap="square" lIns="0" tIns="0" rIns="0" bIns="0" rtlCol="0" anchor="ctr"/>
           <a:lstStyle/>
           <a:p>
-            <a:pPr algn="ctr" indent="0" marL="0">
+            <a:pPr marL="0" indent="0" algn="ctr">
               <a:buNone/>
             </a:pPr>
             <a:r>
@@ -10028,7 +10309,7 @@
           <a:bodyPr wrap="square" lIns="0" tIns="0" rIns="0" bIns="0" rtlCol="0" anchor="ctr"/>
           <a:lstStyle/>
           <a:p>
-            <a:pPr algn="ctr" indent="0" marL="0">
+            <a:pPr marL="0" indent="0" algn="ctr">
               <a:buNone/>
             </a:pPr>
             <a:r>
@@ -10072,6 +10353,13 @@
             <a:prstDash val="solid"/>
           </a:ln>
         </p:spPr>
+        <p:txBody>
+          <a:bodyPr/>
+          <a:lstStyle/>
+          <a:p>
+            <a:endParaRPr lang="en-IN"/>
+          </a:p>
+        </p:txBody>
       </p:sp>
       <p:sp>
         <p:nvSpPr>
@@ -10094,7 +10382,7 @@
           <a:bodyPr wrap="square" lIns="0" tIns="0" rIns="0" bIns="0" rtlCol="0" anchor="ctr"/>
           <a:lstStyle/>
           <a:p>
-            <a:pPr algn="ctr" indent="0" marL="0">
+            <a:pPr marL="0" indent="0" algn="ctr">
               <a:buNone/>
             </a:pPr>
             <a:r>
@@ -10133,7 +10421,7 @@
           <a:bodyPr wrap="square" lIns="0" tIns="0" rIns="0" bIns="0" rtlCol="0" anchor="ctr"/>
           <a:lstStyle/>
           <a:p>
-            <a:pPr algn="ctr" indent="0" marL="0">
+            <a:pPr marL="0" indent="0" algn="ctr">
               <a:buNone/>
             </a:pPr>
             <a:r>
@@ -10174,6 +10462,13 @@
             <a:tailEnd type="triangle"/>
           </a:ln>
         </p:spPr>
+        <p:txBody>
+          <a:bodyPr/>
+          <a:lstStyle/>
+          <a:p>
+            <a:endParaRPr lang="en-IN"/>
+          </a:p>
+        </p:txBody>
       </p:sp>
       <p:sp>
         <p:nvSpPr>
@@ -10198,6 +10493,13 @@
             <a:tailEnd type="triangle"/>
           </a:ln>
         </p:spPr>
+        <p:txBody>
+          <a:bodyPr/>
+          <a:lstStyle/>
+          <a:p>
+            <a:endParaRPr lang="en-IN"/>
+          </a:p>
+        </p:txBody>
       </p:sp>
       <p:sp>
         <p:nvSpPr>
@@ -10225,6 +10527,13 @@
             <a:prstDash val="solid"/>
           </a:ln>
         </p:spPr>
+        <p:txBody>
+          <a:bodyPr/>
+          <a:lstStyle/>
+          <a:p>
+            <a:endParaRPr lang="en-IN"/>
+          </a:p>
+        </p:txBody>
       </p:sp>
       <p:sp>
         <p:nvSpPr>
@@ -10247,7 +10556,7 @@
           <a:bodyPr wrap="square" lIns="0" tIns="0" rIns="0" bIns="0" rtlCol="0" anchor="ctr"/>
           <a:lstStyle/>
           <a:p>
-            <a:pPr algn="ctr" indent="0" marL="0">
+            <a:pPr marL="0" indent="0" algn="ctr">
               <a:buNone/>
             </a:pPr>
             <a:r>
@@ -10286,7 +10595,7 @@
           <a:bodyPr wrap="square" lIns="0" tIns="0" rIns="0" bIns="0" rtlCol="0" anchor="ctr"/>
           <a:lstStyle/>
           <a:p>
-            <a:pPr algn="ctr" indent="0" marL="0">
+            <a:pPr marL="0" indent="0" algn="ctr">
               <a:buNone/>
             </a:pPr>
             <a:r>
@@ -10303,7 +10612,7 @@
             <a:endParaRPr lang="en-US" sz="1000" dirty="0"/>
           </a:p>
           <a:p>
-            <a:pPr algn="ctr" indent="0" marL="0">
+            <a:pPr marL="0" indent="0" algn="ctr">
               <a:buNone/>
             </a:pPr>
             <a:r>
@@ -10344,6 +10653,13 @@
             <a:tailEnd type="triangle"/>
           </a:ln>
         </p:spPr>
+        <p:txBody>
+          <a:bodyPr/>
+          <a:lstStyle/>
+          <a:p>
+            <a:endParaRPr lang="en-IN"/>
+          </a:p>
+        </p:txBody>
       </p:sp>
       <p:sp>
         <p:nvSpPr>
@@ -10371,6 +10687,13 @@
             <a:prstDash val="solid"/>
           </a:ln>
         </p:spPr>
+        <p:txBody>
+          <a:bodyPr/>
+          <a:lstStyle/>
+          <a:p>
+            <a:endParaRPr lang="en-IN"/>
+          </a:p>
+        </p:txBody>
       </p:sp>
       <p:sp>
         <p:nvSpPr>
@@ -10393,7 +10716,7 @@
           <a:bodyPr wrap="square" lIns="0" tIns="0" rIns="0" bIns="0" rtlCol="0" anchor="ctr"/>
           <a:lstStyle/>
           <a:p>
-            <a:pPr algn="ctr" indent="0" marL="0">
+            <a:pPr marL="0" indent="0" algn="ctr">
               <a:buNone/>
             </a:pPr>
             <a:r>
@@ -10432,7 +10755,7 @@
           <a:bodyPr wrap="square" lIns="0" tIns="0" rIns="0" bIns="0" rtlCol="0" anchor="ctr"/>
           <a:lstStyle/>
           <a:p>
-            <a:pPr algn="ctr" indent="0" marL="0">
+            <a:pPr marL="0" indent="0" algn="ctr">
               <a:buNone/>
             </a:pPr>
             <a:r>
@@ -10449,7 +10772,7 @@
             <a:endParaRPr lang="en-US" sz="1000" dirty="0"/>
           </a:p>
           <a:p>
-            <a:pPr algn="ctr" indent="0" marL="0">
+            <a:pPr marL="0" indent="0" algn="ctr">
               <a:buNone/>
             </a:pPr>
             <a:r>
@@ -10488,7 +10811,7 @@
           <a:bodyPr wrap="square" lIns="0" tIns="0" rIns="0" bIns="0" rtlCol="0" anchor="ctr"/>
           <a:lstStyle/>
           <a:p>
-            <a:pPr algn="ctr" indent="0" marL="0">
+            <a:pPr marL="0" indent="0" algn="ctr">
               <a:buNone/>
             </a:pPr>
             <a:r>
@@ -10527,7 +10850,7 @@
           <a:bodyPr wrap="square" lIns="0" tIns="0" rIns="0" bIns="0" rtlCol="0" anchor="ctr"/>
           <a:lstStyle/>
           <a:p>
-            <a:pPr indent="0" marL="0">
+            <a:pPr marL="0" indent="0">
               <a:buNone/>
             </a:pPr>
             <a:r>
@@ -10566,7 +10889,7 @@
           <a:bodyPr wrap="square" lIns="0" tIns="0" rIns="0" bIns="0" rtlCol="0" anchor="ctr"/>
           <a:lstStyle/>
           <a:p>
-            <a:pPr indent="0" marL="0">
+            <a:pPr marL="0" indent="0">
               <a:buNone/>
             </a:pPr>
             <a:r>
@@ -10605,7 +10928,7 @@
           <a:bodyPr wrap="square" lIns="0" tIns="0" rIns="0" bIns="0" rtlCol="0" anchor="ctr"/>
           <a:lstStyle/>
           <a:p>
-            <a:pPr indent="0" marL="0">
+            <a:pPr marL="0" indent="0">
               <a:buNone/>
             </a:pPr>
             <a:r>
@@ -10644,7 +10967,7 @@
           <a:bodyPr wrap="square" lIns="0" tIns="0" rIns="0" bIns="0" rtlCol="0" anchor="ctr"/>
           <a:lstStyle/>
           <a:p>
-            <a:pPr indent="0" marL="0">
+            <a:pPr marL="0" indent="0">
               <a:buNone/>
             </a:pPr>
             <a:r>
@@ -10683,7 +11006,7 @@
           <a:bodyPr wrap="square" lIns="0" tIns="0" rIns="0" bIns="0" rtlCol="0" anchor="ctr"/>
           <a:lstStyle/>
           <a:p>
-            <a:pPr indent="0" marL="0">
+            <a:pPr marL="0" indent="0">
               <a:buNone/>
             </a:pPr>
             <a:r>
@@ -10722,7 +11045,7 @@
           <a:bodyPr wrap="square" lIns="0" tIns="0" rIns="0" bIns="0" rtlCol="0" anchor="ctr"/>
           <a:lstStyle/>
           <a:p>
-            <a:pPr indent="0" marL="0">
+            <a:pPr marL="0" indent="0">
               <a:buNone/>
             </a:pPr>
             <a:r>
@@ -10761,7 +11084,7 @@
           <a:bodyPr wrap="square" lIns="0" tIns="0" rIns="0" bIns="0" rtlCol="0" anchor="ctr"/>
           <a:lstStyle/>
           <a:p>
-            <a:pPr indent="0" marL="0">
+            <a:pPr marL="0" indent="0">
               <a:buNone/>
             </a:pPr>
             <a:r>
@@ -10800,7 +11123,7 @@
           <a:bodyPr wrap="square" lIns="0" tIns="0" rIns="0" bIns="0" rtlCol="0" anchor="ctr"/>
           <a:lstStyle/>
           <a:p>
-            <a:pPr indent="0" marL="0">
+            <a:pPr marL="0" indent="0">
               <a:buNone/>
             </a:pPr>
             <a:r>
@@ -10834,6 +11157,7 @@
         <a:solidFill>
           <a:srgbClr val="121C33"/>
         </a:solidFill>
+        <a:effectLst/>
       </p:bgPr>
     </p:bg>
     <p:spTree>
@@ -10871,11 +11195,11 @@
           <a:bodyPr wrap="square" lIns="0" tIns="0" rIns="0" bIns="0" rtlCol="0" anchor="ctr"/>
           <a:lstStyle/>
           <a:p>
-            <a:pPr indent="0" marL="0">
-              <a:buNone/>
-            </a:pPr>
-            <a:r>
-              <a:rPr lang="en-US" sz="1200" b="1" spc="250" kern="0" dirty="0">
+            <a:pPr marL="0" indent="0">
+              <a:buNone/>
+            </a:pPr>
+            <a:r>
+              <a:rPr lang="en-US" sz="1200" b="1" kern="0" spc="250" dirty="0">
                 <a:solidFill>
                   <a:srgbClr val="2EC27E"/>
                 </a:solidFill>
@@ -10910,7 +11234,7 @@
           <a:bodyPr wrap="square" lIns="0" tIns="0" rIns="0" bIns="0" rtlCol="0" anchor="ctr"/>
           <a:lstStyle/>
           <a:p>
-            <a:pPr indent="0" marL="0">
+            <a:pPr marL="0" indent="0">
               <a:buNone/>
             </a:pPr>
             <a:r>
@@ -10954,6 +11278,13 @@
             <a:prstDash val="solid"/>
           </a:ln>
         </p:spPr>
+        <p:txBody>
+          <a:bodyPr/>
+          <a:lstStyle/>
+          <a:p>
+            <a:endParaRPr lang="en-IN"/>
+          </a:p>
+        </p:txBody>
       </p:sp>
       <p:sp>
         <p:nvSpPr>
@@ -10976,7 +11307,7 @@
           <a:bodyPr wrap="square" lIns="0" tIns="0" rIns="0" bIns="0" rtlCol="0" anchor="ctr"/>
           <a:lstStyle/>
           <a:p>
-            <a:pPr indent="0" marL="0">
+            <a:pPr marL="0" indent="0">
               <a:buNone/>
             </a:pPr>
             <a:r>
@@ -11020,6 +11351,13 @@
             <a:prstDash val="solid"/>
           </a:ln>
         </p:spPr>
+        <p:txBody>
+          <a:bodyPr/>
+          <a:lstStyle/>
+          <a:p>
+            <a:endParaRPr lang="en-IN"/>
+          </a:p>
+        </p:txBody>
       </p:sp>
       <p:sp>
         <p:nvSpPr>
@@ -11042,7 +11380,7 @@
           <a:bodyPr wrap="square" lIns="0" tIns="0" rIns="0" bIns="0" rtlCol="0" anchor="ctr"/>
           <a:lstStyle/>
           <a:p>
-            <a:pPr algn="ctr" indent="0" marL="0">
+            <a:pPr marL="0" indent="0" algn="ctr">
               <a:buNone/>
             </a:pPr>
             <a:r>
@@ -11081,7 +11419,7 @@
           <a:bodyPr wrap="square" lIns="0" tIns="0" rIns="0" bIns="0" rtlCol="0" anchor="ctr"/>
           <a:lstStyle/>
           <a:p>
-            <a:pPr indent="0" marL="0">
+            <a:pPr marL="0" indent="0">
               <a:buNone/>
             </a:pPr>
             <a:r>
@@ -11125,6 +11463,13 @@
             <a:prstDash val="solid"/>
           </a:ln>
         </p:spPr>
+        <p:txBody>
+          <a:bodyPr/>
+          <a:lstStyle/>
+          <a:p>
+            <a:endParaRPr lang="en-IN"/>
+          </a:p>
+        </p:txBody>
       </p:sp>
       <p:sp>
         <p:nvSpPr>
@@ -11147,7 +11492,7 @@
           <a:bodyPr wrap="square" lIns="0" tIns="0" rIns="0" bIns="0" rtlCol="0" anchor="ctr"/>
           <a:lstStyle/>
           <a:p>
-            <a:pPr indent="0" marL="0">
+            <a:pPr marL="0" indent="0">
               <a:buNone/>
             </a:pPr>
             <a:r>
@@ -11191,6 +11536,13 @@
             <a:prstDash val="solid"/>
           </a:ln>
         </p:spPr>
+        <p:txBody>
+          <a:bodyPr/>
+          <a:lstStyle/>
+          <a:p>
+            <a:endParaRPr lang="en-IN"/>
+          </a:p>
+        </p:txBody>
       </p:sp>
       <p:sp>
         <p:nvSpPr>
@@ -11213,7 +11565,7 @@
           <a:bodyPr wrap="square" lIns="0" tIns="0" rIns="0" bIns="0" rtlCol="0" anchor="ctr"/>
           <a:lstStyle/>
           <a:p>
-            <a:pPr algn="ctr" indent="0" marL="0">
+            <a:pPr marL="0" indent="0" algn="ctr">
               <a:buNone/>
             </a:pPr>
             <a:r>
@@ -11252,7 +11604,7 @@
           <a:bodyPr wrap="square" lIns="0" tIns="0" rIns="0" bIns="0" rtlCol="0" anchor="ctr"/>
           <a:lstStyle/>
           <a:p>
-            <a:pPr indent="0" marL="0">
+            <a:pPr marL="0" indent="0">
               <a:buNone/>
             </a:pPr>
             <a:r>
@@ -11296,6 +11648,13 @@
             <a:prstDash val="solid"/>
           </a:ln>
         </p:spPr>
+        <p:txBody>
+          <a:bodyPr/>
+          <a:lstStyle/>
+          <a:p>
+            <a:endParaRPr lang="en-IN"/>
+          </a:p>
+        </p:txBody>
       </p:sp>
       <p:sp>
         <p:nvSpPr>
@@ -11318,7 +11677,7 @@
           <a:bodyPr wrap="square" lIns="0" tIns="0" rIns="0" bIns="0" rtlCol="0" anchor="ctr"/>
           <a:lstStyle/>
           <a:p>
-            <a:pPr indent="0" marL="0">
+            <a:pPr marL="0" indent="0">
               <a:buNone/>
             </a:pPr>
             <a:r>
@@ -11362,6 +11721,13 @@
             <a:prstDash val="solid"/>
           </a:ln>
         </p:spPr>
+        <p:txBody>
+          <a:bodyPr/>
+          <a:lstStyle/>
+          <a:p>
+            <a:endParaRPr lang="en-IN"/>
+          </a:p>
+        </p:txBody>
       </p:sp>
       <p:sp>
         <p:nvSpPr>
@@ -11384,7 +11750,7 @@
           <a:bodyPr wrap="square" lIns="0" tIns="0" rIns="0" bIns="0" rtlCol="0" anchor="ctr"/>
           <a:lstStyle/>
           <a:p>
-            <a:pPr algn="ctr" indent="0" marL="0">
+            <a:pPr marL="0" indent="0" algn="ctr">
               <a:buNone/>
             </a:pPr>
             <a:r>
@@ -11396,7 +11762,7 @@
                 <a:ea typeface="Calibri" pitchFamily="34" charset="-122"/>
                 <a:cs typeface="Calibri" pitchFamily="34" charset="-120"/>
               </a:rPr>
-              <a:t>REJECTED</a:t>
+              <a:t>IN PROGRESS</a:t>
             </a:r>
             <a:endParaRPr lang="en-US" sz="1050" dirty="0"/>
           </a:p>
@@ -11423,7 +11789,7 @@
           <a:bodyPr wrap="square" lIns="0" tIns="0" rIns="0" bIns="0" rtlCol="0" anchor="ctr"/>
           <a:lstStyle/>
           <a:p>
-            <a:pPr indent="0" marL="0">
+            <a:pPr marL="0" indent="0">
               <a:buNone/>
             </a:pPr>
             <a:r>
@@ -11467,6 +11833,13 @@
             <a:prstDash val="solid"/>
           </a:ln>
         </p:spPr>
+        <p:txBody>
+          <a:bodyPr/>
+          <a:lstStyle/>
+          <a:p>
+            <a:endParaRPr lang="en-IN"/>
+          </a:p>
+        </p:txBody>
       </p:sp>
       <p:sp>
         <p:nvSpPr>
@@ -11489,7 +11862,7 @@
           <a:bodyPr wrap="square" lIns="0" tIns="0" rIns="0" bIns="0" rtlCol="0" anchor="ctr"/>
           <a:lstStyle/>
           <a:p>
-            <a:pPr indent="0" marL="0">
+            <a:pPr marL="0" indent="0">
               <a:buNone/>
             </a:pPr>
             <a:r>
@@ -11533,6 +11906,13 @@
             <a:prstDash val="solid"/>
           </a:ln>
         </p:spPr>
+        <p:txBody>
+          <a:bodyPr/>
+          <a:lstStyle/>
+          <a:p>
+            <a:endParaRPr lang="en-IN"/>
+          </a:p>
+        </p:txBody>
       </p:sp>
       <p:sp>
         <p:nvSpPr>
@@ -11555,9 +11935,7 @@
           <a:bodyPr wrap="square" lIns="0" tIns="0" rIns="0" bIns="0" rtlCol="0" anchor="ctr"/>
           <a:lstStyle/>
           <a:p>
-            <a:pPr algn="ctr" indent="0" marL="0">
-              <a:buNone/>
-            </a:pPr>
+            <a:pPr algn="ctr"/>
             <a:r>
               <a:rPr lang="en-US" sz="1050" b="1" dirty="0">
                 <a:solidFill>
@@ -11567,7 +11945,7 @@
                 <a:ea typeface="Calibri" pitchFamily="34" charset="-122"/>
                 <a:cs typeface="Calibri" pitchFamily="34" charset="-120"/>
               </a:rPr>
-              <a:t>REJECTED</a:t>
+              <a:t>IN PROGRESS</a:t>
             </a:r>
             <a:endParaRPr lang="en-US" sz="1050" dirty="0"/>
           </a:p>
@@ -11594,7 +11972,7 @@
           <a:bodyPr wrap="square" lIns="0" tIns="0" rIns="0" bIns="0" rtlCol="0" anchor="ctr"/>
           <a:lstStyle/>
           <a:p>
-            <a:pPr indent="0" marL="0">
+            <a:pPr marL="0" indent="0">
               <a:buNone/>
             </a:pPr>
             <a:r>
@@ -11633,7 +12011,7 @@
           <a:bodyPr wrap="square" lIns="0" tIns="0" rIns="0" bIns="0" rtlCol="0" anchor="ctr"/>
           <a:lstStyle/>
           <a:p>
-            <a:pPr indent="0" marL="0">
+            <a:pPr marL="0" indent="0">
               <a:buNone/>
             </a:pPr>
             <a:r>
@@ -11952,4 +12330,319 @@
     </a:ext>
   </a:extLst>
 </a:theme>
+</file>
+
+<file path=ppt/theme/theme2.xml><?xml version="1.0" encoding="utf-8"?>
+<a:theme xmlns:a="http://schemas.openxmlformats.org/drawingml/2006/main" name="Office Theme">
+  <a:themeElements>
+    <a:clrScheme name="Office">
+      <a:dk1>
+        <a:sysClr val="windowText" lastClr="000000"/>
+      </a:dk1>
+      <a:lt1>
+        <a:sysClr val="window" lastClr="FFFFFF"/>
+      </a:lt1>
+      <a:dk2>
+        <a:srgbClr val="0E2841"/>
+      </a:dk2>
+      <a:lt2>
+        <a:srgbClr val="E8E8E8"/>
+      </a:lt2>
+      <a:accent1>
+        <a:srgbClr val="156082"/>
+      </a:accent1>
+      <a:accent2>
+        <a:srgbClr val="E97132"/>
+      </a:accent2>
+      <a:accent3>
+        <a:srgbClr val="196B24"/>
+      </a:accent3>
+      <a:accent4>
+        <a:srgbClr val="0F9ED5"/>
+      </a:accent4>
+      <a:accent5>
+        <a:srgbClr val="A02B93"/>
+      </a:accent5>
+      <a:accent6>
+        <a:srgbClr val="4EA72E"/>
+      </a:accent6>
+      <a:hlink>
+        <a:srgbClr val="467886"/>
+      </a:hlink>
+      <a:folHlink>
+        <a:srgbClr val="96607D"/>
+      </a:folHlink>
+    </a:clrScheme>
+    <a:fontScheme name="Office">
+      <a:majorFont>
+        <a:latin typeface="Aptos Display" panose="02110004020202020204"/>
+        <a:ea typeface=""/>
+        <a:cs typeface=""/>
+        <a:font script="Jpan" typeface="游ゴシック Light"/>
+        <a:font script="Hang" typeface="맑은 고딕"/>
+        <a:font script="Hans" typeface="等线 Light"/>
+        <a:font script="Hant" typeface="新細明體"/>
+        <a:font script="Arab" typeface="Times New Roman"/>
+        <a:font script="Hebr" typeface="Times New Roman"/>
+        <a:font script="Thai" typeface="Angsana New"/>
+        <a:font script="Ethi" typeface="Nyala"/>
+        <a:font script="Beng" typeface="Vrinda"/>
+        <a:font script="Gujr" typeface="Shruti"/>
+        <a:font script="Khmr" typeface="MoolBoran"/>
+        <a:font script="Knda" typeface="Tunga"/>
+        <a:font script="Guru" typeface="Raavi"/>
+        <a:font script="Cans" typeface="Euphemia"/>
+        <a:font script="Cher" typeface="Plantagenet Cherokee"/>
+        <a:font script="Yiii" typeface="Microsoft Yi Baiti"/>
+        <a:font script="Tibt" typeface="Microsoft Himalaya"/>
+        <a:font script="Thaa" typeface="MV Boli"/>
+        <a:font script="Deva" typeface="Mangal"/>
+        <a:font script="Telu" typeface="Gautami"/>
+        <a:font script="Taml" typeface="Latha"/>
+        <a:font script="Syrc" typeface="Estrangelo Edessa"/>
+        <a:font script="Orya" typeface="Kalinga"/>
+        <a:font script="Mlym" typeface="Kartika"/>
+        <a:font script="Laoo" typeface="DokChampa"/>
+        <a:font script="Sinh" typeface="Iskoola Pota"/>
+        <a:font script="Mong" typeface="Mongolian Baiti"/>
+        <a:font script="Viet" typeface="Times New Roman"/>
+        <a:font script="Uigh" typeface="Microsoft Uighur"/>
+        <a:font script="Geor" typeface="Sylfaen"/>
+        <a:font script="Armn" typeface="Arial"/>
+        <a:font script="Bugi" typeface="Leelawadee UI"/>
+        <a:font script="Bopo" typeface="Microsoft JhengHei"/>
+        <a:font script="Java" typeface="Javanese Text"/>
+        <a:font script="Lisu" typeface="Segoe UI"/>
+        <a:font script="Mymr" typeface="Myanmar Text"/>
+        <a:font script="Nkoo" typeface="Ebrima"/>
+        <a:font script="Olck" typeface="Nirmala UI"/>
+        <a:font script="Osma" typeface="Ebrima"/>
+        <a:font script="Phag" typeface="Phagspa"/>
+        <a:font script="Syrn" typeface="Estrangelo Edessa"/>
+        <a:font script="Syrj" typeface="Estrangelo Edessa"/>
+        <a:font script="Syre" typeface="Estrangelo Edessa"/>
+        <a:font script="Sora" typeface="Nirmala UI"/>
+        <a:font script="Tale" typeface="Microsoft Tai Le"/>
+        <a:font script="Talu" typeface="Microsoft New Tai Lue"/>
+        <a:font script="Tfng" typeface="Ebrima"/>
+      </a:majorFont>
+      <a:minorFont>
+        <a:latin typeface="Aptos" panose="02110004020202020204"/>
+        <a:ea typeface=""/>
+        <a:cs typeface=""/>
+        <a:font script="Jpan" typeface="游ゴシック"/>
+        <a:font script="Hang" typeface="맑은 고딕"/>
+        <a:font script="Hans" typeface="等线"/>
+        <a:font script="Hant" typeface="新細明體"/>
+        <a:font script="Arab" typeface="Arial"/>
+        <a:font script="Hebr" typeface="Arial"/>
+        <a:font script="Thai" typeface="Cordia New"/>
+        <a:font script="Ethi" typeface="Nyala"/>
+        <a:font script="Beng" typeface="Vrinda"/>
+        <a:font script="Gujr" typeface="Shruti"/>
+        <a:font script="Khmr" typeface="DaunPenh"/>
+        <a:font script="Knda" typeface="Tunga"/>
+        <a:font script="Guru" typeface="Raavi"/>
+        <a:font script="Cans" typeface="Euphemia"/>
+        <a:font script="Cher" typeface="Plantagenet Cherokee"/>
+        <a:font script="Yiii" typeface="Microsoft Yi Baiti"/>
+        <a:font script="Tibt" typeface="Microsoft Himalaya"/>
+        <a:font script="Thaa" typeface="MV Boli"/>
+        <a:font script="Deva" typeface="Mangal"/>
+        <a:font script="Telu" typeface="Gautami"/>
+        <a:font script="Taml" typeface="Latha"/>
+        <a:font script="Syrc" typeface="Estrangelo Edessa"/>
+        <a:font script="Orya" typeface="Kalinga"/>
+        <a:font script="Mlym" typeface="Kartika"/>
+        <a:font script="Laoo" typeface="DokChampa"/>
+        <a:font script="Sinh" typeface="Iskoola Pota"/>
+        <a:font script="Mong" typeface="Mongolian Baiti"/>
+        <a:font script="Viet" typeface="Arial"/>
+        <a:font script="Uigh" typeface="Microsoft Uighur"/>
+        <a:font script="Geor" typeface="Sylfaen"/>
+        <a:font script="Armn" typeface="Arial"/>
+        <a:font script="Bugi" typeface="Leelawadee UI"/>
+        <a:font script="Bopo" typeface="Microsoft JhengHei"/>
+        <a:font script="Java" typeface="Javanese Text"/>
+        <a:font script="Lisu" typeface="Segoe UI"/>
+        <a:font script="Mymr" typeface="Myanmar Text"/>
+        <a:font script="Nkoo" typeface="Ebrima"/>
+        <a:font script="Olck" typeface="Nirmala UI"/>
+        <a:font script="Osma" typeface="Ebrima"/>
+        <a:font script="Phag" typeface="Phagspa"/>
+        <a:font script="Syrn" typeface="Estrangelo Edessa"/>
+        <a:font script="Syrj" typeface="Estrangelo Edessa"/>
+        <a:font script="Syre" typeface="Estrangelo Edessa"/>
+        <a:font script="Sora" typeface="Nirmala UI"/>
+        <a:font script="Tale" typeface="Microsoft Tai Le"/>
+        <a:font script="Talu" typeface="Microsoft New Tai Lue"/>
+        <a:font script="Tfng" typeface="Ebrima"/>
+      </a:minorFont>
+    </a:fontScheme>
+    <a:fmtScheme name="Office">
+      <a:fillStyleLst>
+        <a:solidFill>
+          <a:schemeClr val="phClr"/>
+        </a:solidFill>
+        <a:gradFill rotWithShape="1">
+          <a:gsLst>
+            <a:gs pos="0">
+              <a:schemeClr val="phClr">
+                <a:lumMod val="110000"/>
+                <a:satMod val="105000"/>
+                <a:tint val="67000"/>
+              </a:schemeClr>
+            </a:gs>
+            <a:gs pos="50000">
+              <a:schemeClr val="phClr">
+                <a:lumMod val="105000"/>
+                <a:satMod val="103000"/>
+                <a:tint val="73000"/>
+              </a:schemeClr>
+            </a:gs>
+            <a:gs pos="100000">
+              <a:schemeClr val="phClr">
+                <a:lumMod val="105000"/>
+                <a:satMod val="109000"/>
+                <a:tint val="81000"/>
+              </a:schemeClr>
+            </a:gs>
+          </a:gsLst>
+          <a:lin ang="5400000" scaled="0"/>
+        </a:gradFill>
+        <a:gradFill rotWithShape="1">
+          <a:gsLst>
+            <a:gs pos="0">
+              <a:schemeClr val="phClr">
+                <a:satMod val="103000"/>
+                <a:lumMod val="102000"/>
+                <a:tint val="94000"/>
+              </a:schemeClr>
+            </a:gs>
+            <a:gs pos="50000">
+              <a:schemeClr val="phClr">
+                <a:satMod val="110000"/>
+                <a:lumMod val="100000"/>
+                <a:shade val="100000"/>
+              </a:schemeClr>
+            </a:gs>
+            <a:gs pos="100000">
+              <a:schemeClr val="phClr">
+                <a:lumMod val="99000"/>
+                <a:satMod val="120000"/>
+                <a:shade val="78000"/>
+              </a:schemeClr>
+            </a:gs>
+          </a:gsLst>
+          <a:lin ang="5400000" scaled="0"/>
+        </a:gradFill>
+      </a:fillStyleLst>
+      <a:lnStyleLst>
+        <a:ln w="12700" cap="flat" cmpd="sng" algn="ctr">
+          <a:solidFill>
+            <a:schemeClr val="phClr"/>
+          </a:solidFill>
+          <a:prstDash val="solid"/>
+          <a:miter lim="800000"/>
+        </a:ln>
+        <a:ln w="19050" cap="flat" cmpd="sng" algn="ctr">
+          <a:solidFill>
+            <a:schemeClr val="phClr"/>
+          </a:solidFill>
+          <a:prstDash val="solid"/>
+          <a:miter lim="800000"/>
+        </a:ln>
+        <a:ln w="25400" cap="flat" cmpd="sng" algn="ctr">
+          <a:solidFill>
+            <a:schemeClr val="phClr"/>
+          </a:solidFill>
+          <a:prstDash val="solid"/>
+          <a:miter lim="800000"/>
+        </a:ln>
+      </a:lnStyleLst>
+      <a:effectStyleLst>
+        <a:effectStyle>
+          <a:effectLst/>
+        </a:effectStyle>
+        <a:effectStyle>
+          <a:effectLst/>
+        </a:effectStyle>
+        <a:effectStyle>
+          <a:effectLst>
+            <a:outerShdw blurRad="57150" dist="19050" dir="5400000" algn="ctr" rotWithShape="0">
+              <a:srgbClr val="000000">
+                <a:alpha val="63000"/>
+              </a:srgbClr>
+            </a:outerShdw>
+          </a:effectLst>
+        </a:effectStyle>
+      </a:effectStyleLst>
+      <a:bgFillStyleLst>
+        <a:solidFill>
+          <a:schemeClr val="phClr"/>
+        </a:solidFill>
+        <a:solidFill>
+          <a:schemeClr val="phClr">
+            <a:tint val="95000"/>
+            <a:satMod val="170000"/>
+          </a:schemeClr>
+        </a:solidFill>
+        <a:gradFill rotWithShape="1">
+          <a:gsLst>
+            <a:gs pos="0">
+              <a:schemeClr val="phClr">
+                <a:tint val="93000"/>
+                <a:satMod val="150000"/>
+                <a:shade val="98000"/>
+                <a:lumMod val="102000"/>
+              </a:schemeClr>
+            </a:gs>
+            <a:gs pos="50000">
+              <a:schemeClr val="phClr">
+                <a:tint val="98000"/>
+                <a:satMod val="130000"/>
+                <a:shade val="90000"/>
+                <a:lumMod val="103000"/>
+              </a:schemeClr>
+            </a:gs>
+            <a:gs pos="100000">
+              <a:schemeClr val="phClr">
+                <a:shade val="63000"/>
+                <a:satMod val="120000"/>
+              </a:schemeClr>
+            </a:gs>
+          </a:gsLst>
+          <a:lin ang="5400000" scaled="0"/>
+        </a:gradFill>
+      </a:bgFillStyleLst>
+    </a:fmtScheme>
+  </a:themeElements>
+  <a:objectDefaults>
+    <a:lnDef>
+      <a:spPr/>
+      <a:bodyPr/>
+      <a:lstStyle/>
+      <a:style>
+        <a:lnRef idx="2">
+          <a:schemeClr val="accent1"/>
+        </a:lnRef>
+        <a:fillRef idx="0">
+          <a:schemeClr val="accent1"/>
+        </a:fillRef>
+        <a:effectRef idx="1">
+          <a:schemeClr val="accent1"/>
+        </a:effectRef>
+        <a:fontRef idx="minor">
+          <a:schemeClr val="tx1"/>
+        </a:fontRef>
+      </a:style>
+    </a:lnDef>
+  </a:objectDefaults>
+  <a:extraClrSchemeLst/>
+  <a:extLst>
+    <a:ext uri="{05A4C25C-085E-4340-85A3-A5531E510DB2}">
+      <thm15:themeFamily xmlns:thm15="http://schemas.microsoft.com/office/thememl/2012/main" name="Office Theme" id="{2E142A2C-CD16-42D6-873A-C26D2A0506FA}" vid="{1BDDFF52-6CD6-40A5-AB3C-68EB2F1E4D0A}"/>
+    </a:ext>
+  </a:extLst>
+</a:theme>
 </file>